--- a/meonske-ai-2026.pptx
+++ b/meonske-ai-2026.pptx
@@ -4,6 +4,9 @@
   <p:sldMasterIdLst>
     <p:sldMasterId id="2147483648" r:id="rId1"/>
   </p:sldMasterIdLst>
+  <p:notesMasterIdLst>
+    <p:notesMasterId r:id="rId16"/>
+  </p:notesMasterIdLst>
   <p:sldIdLst>
     <p:sldId id="256" r:id="rId2"/>
     <p:sldId id="257" r:id="rId3"/>
@@ -20,10 +23,7 @@
     <p:sldId id="268" r:id="rId14"/>
     <p:sldId id="269" r:id="rId15"/>
   </p:sldIdLst>
-  <p:notesMasterIdLst>
-    <p:notesMasterId r:id="rId16"/>
-  </p:notesMasterIdLst>
-  <p:sldSz cx="9144000" cy="5143500"/>
+  <p:sldSz cx="9144000" cy="5143500" type="screen16x9"/>
   <p:notesSz cx="5143500" cy="9144000"/>
   <p:defaultTextStyle>
     <a:lvl1pPr marL="0" algn="l" defTabSz="914400" rtl="0" eaLnBrk="1" latinLnBrk="0" hangingPunct="1">
@@ -117,6 +117,11 @@
       </a:defRPr>
     </a:lvl9pPr>
   </p:defaultTextStyle>
+  <p:extLst>
+    <p:ext uri="{EFAFB233-063F-42B5-8137-9DF3F51BA10A}">
+      <p15:sldGuideLst xmlns:p15="http://schemas.microsoft.com/office/powerpoint/2012/main"/>
+    </p:ext>
+  </p:extLst>
 </p:presentation>
 </file>
 
@@ -142,234 +147,10 @@
           <a:chExt cx="0" cy="0"/>
         </a:xfrm>
       </p:grpSpPr>
-      <p:sp>
-        <p:nvSpPr>
-          <p:cNvPr id="2" name="Header Placeholder 1"/>
-          <p:cNvSpPr>
-            <a:spLocks noGrp="1"/>
-          </p:cNvSpPr>
-          <p:nvPr>
-            <p:ph type="hdr" sz="quarter"/>
-          </p:nvPr>
-        </p:nvSpPr>
-        <p:spPr>
-          <a:xfrm>
-            <a:off x="0" y="0"/>
-            <a:ext cx="2971800" cy="458788"/>
-          </a:xfrm>
-          <a:prstGeom prst="rect">
-            <a:avLst/>
-          </a:prstGeom>
-        </p:spPr>
-        <p:txBody>
-          <a:bodyPr vert="horz" lIns="91440" tIns="45720" rIns="91440" bIns="45720" rtlCol="0"/>
-          <a:lstStyle>
-            <a:lvl1pPr algn="l">
-              <a:defRPr sz="1200"/>
-            </a:lvl1pPr>
-          </a:lstStyle>
-          <a:p>
-            <a:endParaRPr lang="en-US"/>
-          </a:p>
-        </p:txBody>
-      </p:sp>
-      <p:sp>
-        <p:nvSpPr>
-          <p:cNvPr id="3" name="Date Placeholder 2"/>
-          <p:cNvSpPr>
-            <a:spLocks noGrp="1"/>
-          </p:cNvSpPr>
-          <p:nvPr>
-            <p:ph type="dt" idx="1"/>
-          </p:nvPr>
-        </p:nvSpPr>
-        <p:spPr>
-          <a:xfrm>
-            <a:off x="3884613" y="0"/>
-            <a:ext cx="2971800" cy="458788"/>
-          </a:xfrm>
-          <a:prstGeom prst="rect">
-            <a:avLst/>
-          </a:prstGeom>
-        </p:spPr>
-        <p:txBody>
-          <a:bodyPr vert="horz" lIns="91440" tIns="45720" rIns="91440" bIns="45720" rtlCol="0"/>
-          <a:lstStyle>
-            <a:lvl1pPr algn="r">
-              <a:defRPr sz="1200"/>
-            </a:lvl1pPr>
-          </a:lstStyle>
-          <a:p>
-            <a:fld id="{5282F153-3F37-0F45-9E97-73ACFA13230C}" type="datetimeFigureOut">
-              <a:rPr lang="en-US"/>
-              <a:t>7/23/19</a:t>
-            </a:fld>
-            <a:endParaRPr lang="en-US"/>
-          </a:p>
-        </p:txBody>
-      </p:sp>
-      <p:sp>
-        <p:nvSpPr>
-          <p:cNvPr id="4" name="Slide Image Placeholder 3"/>
-          <p:cNvSpPr>
-            <a:spLocks noGrp="1" noRot="1" noChangeAspect="1"/>
-          </p:cNvSpPr>
-          <p:nvPr>
-            <p:ph type="sldImg" idx="2"/>
-          </p:nvPr>
-        </p:nvSpPr>
-        <p:spPr>
-          <a:xfrm>
-            <a:off x="685800" y="1143000"/>
-            <a:ext cx="5486400" cy="3086100"/>
-          </a:xfrm>
-          <a:prstGeom prst="rect">
-            <a:avLst/>
-          </a:prstGeom>
-          <a:noFill/>
-          <a:ln w="12700">
-            <a:solidFill>
-              <a:prstClr val="black"/>
-            </a:solidFill>
-          </a:ln>
-        </p:spPr>
-        <p:txBody>
-          <a:bodyPr vert="horz" lIns="91440" tIns="45720" rIns="91440" bIns="45720" rtlCol="0" anchor="ctr"/>
-          <a:lstStyle/>
-          <a:p>
-            <a:endParaRPr lang="en-US"/>
-          </a:p>
-        </p:txBody>
-      </p:sp>
-      <p:sp>
-        <p:nvSpPr>
-          <p:cNvPr id="5" name="Notes Placeholder 4"/>
-          <p:cNvSpPr>
-            <a:spLocks noGrp="1"/>
-          </p:cNvSpPr>
-          <p:nvPr>
-            <p:ph type="body" sz="quarter" idx="3"/>
-          </p:nvPr>
-        </p:nvSpPr>
-        <p:spPr>
-          <a:xfrm>
-            <a:off x="685800" y="4400550"/>
-            <a:ext cx="5486400" cy="3600450"/>
-          </a:xfrm>
-          <a:prstGeom prst="rect">
-            <a:avLst/>
-          </a:prstGeom>
-        </p:spPr>
-        <p:txBody>
-          <a:bodyPr vert="horz" lIns="91440" tIns="45720" rIns="91440" bIns="45720" rtlCol="0"/>
-          <a:lstStyle/>
-          <a:p>
-            <a:pPr lvl="0"/>
-            <a:r>
-              <a:rPr lang="en-US"/>
-              <a:t>Click to edit Master text styles</a:t>
-            </a:r>
-          </a:p>
-          <a:p>
-            <a:pPr lvl="1"/>
-            <a:r>
-              <a:rPr lang="en-US"/>
-              <a:t>Second level</a:t>
-            </a:r>
-          </a:p>
-          <a:p>
-            <a:pPr lvl="2"/>
-            <a:r>
-              <a:rPr lang="en-US"/>
-              <a:t>Third level</a:t>
-            </a:r>
-          </a:p>
-          <a:p>
-            <a:pPr lvl="3"/>
-            <a:r>
-              <a:rPr lang="en-US"/>
-              <a:t>Fourth level</a:t>
-            </a:r>
-          </a:p>
-          <a:p>
-            <a:pPr lvl="4"/>
-            <a:r>
-              <a:rPr lang="en-US"/>
-              <a:t>Fifth level</a:t>
-            </a:r>
-          </a:p>
-        </p:txBody>
-      </p:sp>
-      <p:sp>
-        <p:nvSpPr>
-          <p:cNvPr id="6" name="Footer Placeholder 5"/>
-          <p:cNvSpPr>
-            <a:spLocks noGrp="1"/>
-          </p:cNvSpPr>
-          <p:nvPr>
-            <p:ph type="ftr" sz="quarter" idx="4"/>
-          </p:nvPr>
-        </p:nvSpPr>
-        <p:spPr>
-          <a:xfrm>
-            <a:off x="0" y="8685213"/>
-            <a:ext cx="2971800" cy="458787"/>
-          </a:xfrm>
-          <a:prstGeom prst="rect">
-            <a:avLst/>
-          </a:prstGeom>
-        </p:spPr>
-        <p:txBody>
-          <a:bodyPr vert="horz" lIns="91440" tIns="45720" rIns="91440" bIns="45720" rtlCol="0" anchor="b"/>
-          <a:lstStyle>
-            <a:lvl1pPr algn="l">
-              <a:defRPr sz="1200"/>
-            </a:lvl1pPr>
-          </a:lstStyle>
-          <a:p>
-            <a:endParaRPr lang="en-US"/>
-          </a:p>
-        </p:txBody>
-      </p:sp>
-      <p:sp>
-        <p:nvSpPr>
-          <p:cNvPr id="7" name="Slide Number Placeholder 6"/>
-          <p:cNvSpPr>
-            <a:spLocks noGrp="1"/>
-          </p:cNvSpPr>
-          <p:nvPr>
-            <p:ph type="sldNum" sz="quarter" idx="5"/>
-          </p:nvPr>
-        </p:nvSpPr>
-        <p:spPr>
-          <a:xfrm>
-            <a:off x="3884613" y="8685213"/>
-            <a:ext cx="2971800" cy="458787"/>
-          </a:xfrm>
-          <a:prstGeom prst="rect">
-            <a:avLst/>
-          </a:prstGeom>
-        </p:spPr>
-        <p:txBody>
-          <a:bodyPr vert="horz" lIns="91440" tIns="45720" rIns="91440" bIns="45720" rtlCol="0" anchor="b"/>
-          <a:lstStyle>
-            <a:lvl1pPr algn="r">
-              <a:defRPr sz="1200"/>
-            </a:lvl1pPr>
-          </a:lstStyle>
-          <a:p>
-            <a:fld id="{CE5E9CC1-C706-0F49-92D6-E571CC5EEA8F}" type="slidenum">
-              <a:rPr lang="en-US"/>
-              <a:t>‹#›</a:t>
-            </a:fld>
-            <a:endParaRPr lang="en-US"/>
-          </a:p>
-        </p:txBody>
-      </p:sp>
     </p:spTree>
     <p:extLst>
       <p:ext uri="{BB962C8B-B14F-4D97-AF65-F5344CB8AC3E}">
-        <p14:creationId xmlns:p14="http://schemas.microsoft.com/office/powerpoint/2010/main" val="1024086991"/>
+        <p14:creationId xmlns:p14="http://schemas.microsoft.com/office/powerpoint/2010/main" val="4128629785"/>
       </p:ext>
     </p:extLst>
   </p:cSld>
@@ -518,7 +299,6 @@
               <a:t>Welcome everyone to the Modern AI Excel Stack. I’m George Mount from Stringfest Analytics. Over the next hour, we’re going to look at what AI has actually added to Excel, when it makes sense to use it, and — just as importantly — when it doesn’t. This is a demonstration-based session: you’ll see real tools in action, not just slides.
 Quick show of hands — how many of you use Excel every day? How many of you have tried Copilot in Excel? OK. Whether you’ve tried it or you’re skeptical, by the end of this hour you’ll have a clear framework for when AI helps and when a good old VLOOKUP or PivotTable is still your best friend.</a:t>
             </a:r>
-            <a:endParaRPr lang="en-US" dirty="0"/>
           </a:p>
         </p:txBody>
       </p:sp>
@@ -619,7 +399,6 @@
 PROMPT 3 (Edit with Copilot): “Using EquitySnapshotClean, create two sheets: 1. ‘Snapshot’ with a written summary of sector valuations. 2. ‘Chart’ with a visualization comparing P/E across tickers. Don’t modify the source dataset.”
 [Notice I said “Don’t modify the source dataset.” Always protect your source data. Same reason you never type over imported GL data.]</a:t>
             </a:r>
-            <a:endParaRPr lang="en-US" dirty="0"/>
           </a:p>
         </p:txBody>
       </p:sp>
@@ -723,7 +502,6 @@
 Imagine: your ERP export drops into SharePoint overnight, the script runs automatically, and by the time you get your coffee, the Logs sheet already tells you whether everything looks good or if something needs attention.
 This kind of automation is one of the biggest quick wins I see with teams — a 20-minute setup that saves hours every month. If you’re curious about what that looks like at your org, happy to talk after.</a:t>
             </a:r>
-            <a:endParaRPr lang="en-US" dirty="0"/>
           </a:p>
         </p:txBody>
       </p:sp>
@@ -817,7 +595,6 @@
 If you remember nothing else: “Should we?” before “How can we?”
 Your next step: Come to the Power Query lab, and then pick one real task this week and run it through the SAFE framework before reaching for AI. That’s how you make this stick. And if you want to go further, grab the resource page — I’ll show you that on the next slide.</a:t>
             </a:r>
-            <a:endParaRPr lang="en-US" dirty="0"/>
           </a:p>
         </p:txBody>
       </p:sp>
@@ -908,7 +685,6 @@
 And if your team is thinking about rolling out Copilot or modernizing your Excel workflows, that’s what I do — I work with finance and accounting teams on training and adoption. Grab me after or shoot me an email.
 And don’t forget the Power Query lab session — that’s where we go hands-on with everything from Demo 1.</a:t>
             </a:r>
-            <a:endParaRPr lang="en-US" dirty="0"/>
           </a:p>
         </p:txBody>
       </p:sp>
@@ -996,7 +772,6 @@
               <a:rPr lang="en-US" dirty="0"/>
               <a:t>Thank you all. Grab the resource page if you haven’t already — stringfestanalytics.com/meonske-2026. See you in the Power Query lab. And if you want to talk about what this looks like at your organization, catch me in the hall or send me an email. Have a great rest of the conference.</a:t>
             </a:r>
-            <a:endParaRPr lang="en-US" dirty="0"/>
           </a:p>
         </p:txBody>
       </p:sp>
@@ -1084,7 +859,6 @@
               <a:rPr lang="en-US" dirty="0"/>
               <a:t>Quick background on me. I’m the author of Advancing Into Analytics and Modern Data Analytics in Excel, both from O’Reilly. I’m a Microsoft MVP, LinkedIn Learning instructor, and I’ve spoken at events like the Global Excel Summit. My focus is helping people like you — finance and accounting professionals — get more from Excel without needing a CS degree. I come at this from a practical angle, not a hype angle. I also work directly with teams on training and adoption — so everything I show you today comes from what I see working in real organizations, not just theory.</a:t>
             </a:r>
-            <a:endParaRPr lang="en-US" dirty="0"/>
           </a:p>
         </p:txBody>
       </p:sp>
@@ -1176,7 +950,6 @@
 Four is automation. If you’ve ever thought “I run this same reconciliation check every Monday morning” — Office Scripts and Power Automate can do that for you while you’re getting coffee.
 Five is the big picture: a framework you can actually use back at work, not just hype.</a:t>
             </a:r>
-            <a:endParaRPr lang="en-US" dirty="0"/>
           </a:p>
         </p:txBody>
       </p:sp>
@@ -1271,7 +1044,6 @@
 These four dimensions don’t give you a yes or no on their own. What they do is surface risk. They tell you whether AI increases or decreases confidence in the outcome. In general, AI fits best when ambiguity is high, stability requirements are low, frequency is limited, and exposure is contained. As those conditions reverse, deterministic tools should take over.
 SAFE helps you decide whether AI should even be considered. On the next slide, I’ll show you which tool to reach for. This framework comes from my blog at stringfestanalytics.com — I’ll share the link at the end.</a:t>
             </a:r>
-            <a:endParaRPr lang="en-US" dirty="0"/>
           </a:p>
         </p:txBody>
       </p:sp>
@@ -1369,7 +1141,6 @@
 Bottom-right: CONVENIENCE ZONE. Low stability, low ambiguity. Not everything needs to be engineered. Your colleague asks “hey, what’s the average revenue per customer in this list?” One-off, no one’s auditing it. Use whatever is fastest — a formula, Copilot, doesn’t matter. This quadrant gives you permission to just move on.
 The critical distinction on this slide: a DETERMINISTIC SCRIPT gives the same answer every time. A PROBABILISTIC PROMPT may not. When someone in your org says “let’s just have Copilot do the month-end close,” this matrix is your pushback tool. And the rule of thumb: if leadership depends on the output, AI stays upstream.</a:t>
             </a:r>
-            <a:endParaRPr lang="en-US" dirty="0"/>
           </a:p>
         </p:txBody>
       </p:sp>
@@ -1462,7 +1233,6 @@
 And let’s be honest — cloud-based machine learning has been in Excel for YEARS. Stock data types, the Ideas feature, Forecast Sheet, even AutoComplete — these all send data to Microsoft’s cloud. If your firm uses Office 365 with SharePoint, you’re already in this world. This is not a new risk category. It’s an evolution of risk you’re already managing.
 Now, ChatGPT and other public tools ARE a different story — those DO send data outside your organization. Don’t paste your client’s financial statements into ChatGPT. But paid M365 Copilot? That’s inside your fence. Talk to your IT team about your tenant settings if you’re not sure.</a:t>
             </a:r>
-            <a:endParaRPr lang="en-US" dirty="0"/>
           </a:p>
         </p:txBody>
       </p:sp>
@@ -1556,7 +1326,6 @@
 You’ll see this in Demo 2 when we use Edit with Copilot. That’s an agent working inside your workbook. Claude has this too — their product called Cowork can read your files, write documents, create presentations, run code. The point isn’t which agent is best right now. The point is: this is where all of AI is heading. Soon you won’t be prompting one question at a time — you’ll hand it a goal and supervise the result.
 For today though: Copilot is the version of this you can use inside Excel right now. That’s why we’re starting there.</a:t>
             </a:r>
-            <a:endParaRPr lang="en-US" dirty="0"/>
           </a:p>
         </p:txBody>
       </p:sp>
@@ -1649,7 +1418,6 @@
 • Office Scripts are for automating actions. They do things inside the workbook — run calculations, check values, write results to a log, format cells. And crucially, they can be triggered by Power Automate on a schedule or an event. Power Query can’t do that — it can’t run itself at 7am on Monday.
 So in our demos: Power Query cleans the data (Demo 1), Copilot helps us explore and analyze it (Demo 2), and Office Scripts validate it and log the results automatically (Demo 3). Three different tools, three different jobs. They’re a stack, not competitors.</a:t>
             </a:r>
-            <a:endParaRPr lang="en-US" dirty="0"/>
           </a:p>
         </p:txBody>
       </p:sp>
@@ -1747,7 +1515,6 @@
 PROMPT 2: “Based on your observations, outline a short step-by-step cleaning plan I could apply in Power Query.”
 PROMPT 3 (after building in PQ): “Review the steps I’ve applied so far and suggest improvements to cleanliness, clarity, and structure. Don’t change the logic. Only make the transformations clearer.”</a:t>
             </a:r>
-            <a:endParaRPr lang="en-US" dirty="0"/>
           </a:p>
         </p:txBody>
       </p:sp>
@@ -1820,6 +1587,11 @@
 <file path=ppt/slideMasters/slideMaster1.xml><?xml version="1.0" encoding="utf-8"?>
 <p:sldMaster xmlns:a="http://schemas.openxmlformats.org/drawingml/2006/main" xmlns:r="http://schemas.openxmlformats.org/officeDocument/2006/relationships" xmlns:p="http://schemas.openxmlformats.org/presentationml/2006/main">
   <p:cSld>
+    <p:bg>
+      <p:bgRef idx="1001">
+        <a:schemeClr val="bg1"/>
+      </p:bgRef>
+    </p:bg>
     <p:spTree>
       <p:nvGrpSpPr>
         <p:cNvPr id="1" name=""/>
@@ -2102,6 +1874,7 @@
         <a:solidFill>
           <a:srgbClr val="EEECE1"/>
         </a:solidFill>
+        <a:effectLst/>
       </p:bgPr>
     </p:bg>
     <p:spTree>
@@ -2137,6 +1910,13 @@
           </a:solidFill>
           <a:ln/>
         </p:spPr>
+        <p:txBody>
+          <a:bodyPr/>
+          <a:lstStyle/>
+          <a:p>
+            <a:endParaRPr lang="en-US"/>
+          </a:p>
+        </p:txBody>
       </p:sp>
       <p:sp>
         <p:nvSpPr>
@@ -2157,6 +1937,13 @@
           </a:solidFill>
           <a:ln/>
         </p:spPr>
+        <p:txBody>
+          <a:bodyPr/>
+          <a:lstStyle/>
+          <a:p>
+            <a:endParaRPr lang="en-US"/>
+          </a:p>
+        </p:txBody>
       </p:sp>
       <p:sp>
         <p:nvSpPr>
@@ -2179,7 +1966,7 @@
           <a:bodyPr wrap="square" lIns="0" tIns="0" rIns="0" bIns="0" rtlCol="0" anchor="ctr"/>
           <a:lstStyle/>
           <a:p>
-            <a:pPr indent="0" marL="0">
+            <a:pPr marL="0" indent="0">
               <a:buNone/>
             </a:pPr>
             <a:r>
@@ -2218,7 +2005,7 @@
           <a:bodyPr wrap="square" lIns="0" tIns="0" rIns="0" bIns="0" rtlCol="0" anchor="ctr"/>
           <a:lstStyle/>
           <a:p>
-            <a:pPr indent="0" marL="0">
+            <a:pPr marL="0" indent="0">
               <a:lnSpc>
                 <a:spcPct val="95000"/>
               </a:lnSpc>
@@ -2238,7 +2025,7 @@
             <a:endParaRPr lang="en-US" sz="4200" dirty="0"/>
           </a:p>
           <a:p>
-            <a:pPr indent="0" marL="0">
+            <a:pPr marL="0" indent="0">
               <a:lnSpc>
                 <a:spcPct val="95000"/>
               </a:lnSpc>
@@ -2280,7 +2067,7 @@
           <a:bodyPr wrap="square" lIns="0" tIns="0" rIns="0" bIns="0" rtlCol="0" anchor="ctr"/>
           <a:lstStyle/>
           <a:p>
-            <a:pPr indent="0" marL="0">
+            <a:pPr marL="0" indent="0">
               <a:buNone/>
             </a:pPr>
             <a:r>
@@ -2319,7 +2106,7 @@
           <a:bodyPr wrap="square" lIns="0" tIns="0" rIns="0" bIns="0" rtlCol="0" anchor="ctr"/>
           <a:lstStyle/>
           <a:p>
-            <a:pPr indent="0" marL="0">
+            <a:pPr marL="0" indent="0">
               <a:buNone/>
             </a:pPr>
             <a:r>
@@ -2336,7 +2123,7 @@
             <a:endParaRPr lang="en-US" sz="1300" dirty="0"/>
           </a:p>
           <a:p>
-            <a:pPr indent="0" marL="0">
+            <a:pPr marL="0" indent="0">
               <a:buNone/>
             </a:pPr>
             <a:r>
@@ -2375,7 +2162,7 @@
           <a:bodyPr wrap="square" lIns="0" tIns="0" rIns="0" bIns="0" rtlCol="0" anchor="ctr"/>
           <a:lstStyle/>
           <a:p>
-            <a:pPr algn="ctr" indent="0" marL="0">
+            <a:pPr marL="0" indent="0" algn="ctr">
               <a:lnSpc>
                 <a:spcPct val="80000"/>
               </a:lnSpc>
@@ -2395,7 +2182,7 @@
             <a:endParaRPr lang="en-US" sz="4800" dirty="0"/>
           </a:p>
           <a:p>
-            <a:pPr algn="ctr" indent="0" marL="0">
+            <a:pPr marL="0" indent="0" algn="ctr">
               <a:lnSpc>
                 <a:spcPct val="80000"/>
               </a:lnSpc>
@@ -2437,7 +2224,7 @@
           <a:bodyPr wrap="square" lIns="0" tIns="0" rIns="0" bIns="0" rtlCol="0" anchor="ctr"/>
           <a:lstStyle/>
           <a:p>
-            <a:pPr algn="ctr" indent="0" marL="0">
+            <a:pPr marL="0" indent="0" algn="ctr">
               <a:buNone/>
             </a:pPr>
             <a:r>
@@ -2454,7 +2241,7 @@
             <a:endParaRPr lang="en-US" sz="1400" dirty="0"/>
           </a:p>
           <a:p>
-            <a:pPr algn="ctr" indent="0" marL="0">
+            <a:pPr marL="0" indent="0" algn="ctr">
               <a:buNone/>
             </a:pPr>
             <a:r>
@@ -2488,6 +2275,7 @@
         <a:solidFill>
           <a:srgbClr val="EEECE1"/>
         </a:solidFill>
+        <a:effectLst/>
       </p:bgPr>
     </p:bg>
     <p:spTree>
@@ -2523,6 +2311,13 @@
           </a:solidFill>
           <a:ln/>
         </p:spPr>
+        <p:txBody>
+          <a:bodyPr/>
+          <a:lstStyle/>
+          <a:p>
+            <a:endParaRPr lang="en-US"/>
+          </a:p>
+        </p:txBody>
       </p:sp>
       <p:sp>
         <p:nvSpPr>
@@ -2543,6 +2338,13 @@
           </a:solidFill>
           <a:ln/>
         </p:spPr>
+        <p:txBody>
+          <a:bodyPr/>
+          <a:lstStyle/>
+          <a:p>
+            <a:endParaRPr lang="en-US"/>
+          </a:p>
+        </p:txBody>
       </p:sp>
       <p:sp>
         <p:nvSpPr>
@@ -2563,6 +2365,13 @@
           </a:solidFill>
           <a:ln/>
         </p:spPr>
+        <p:txBody>
+          <a:bodyPr/>
+          <a:lstStyle/>
+          <a:p>
+            <a:endParaRPr lang="en-US"/>
+          </a:p>
+        </p:txBody>
       </p:sp>
       <p:sp>
         <p:nvSpPr>
@@ -2585,7 +2394,7 @@
           <a:bodyPr wrap="square" lIns="0" tIns="0" rIns="0" bIns="0" rtlCol="0" anchor="ctr"/>
           <a:lstStyle/>
           <a:p>
-            <a:pPr algn="ctr" indent="0" marL="0">
+            <a:pPr marL="0" indent="0" algn="ctr">
               <a:buNone/>
             </a:pPr>
             <a:r>
@@ -2624,7 +2433,7 @@
           <a:bodyPr wrap="square" lIns="0" tIns="0" rIns="0" bIns="0" rtlCol="0" anchor="ctr"/>
           <a:lstStyle/>
           <a:p>
-            <a:pPr indent="0" marL="0">
+            <a:pPr marL="0" indent="0">
               <a:buNone/>
             </a:pPr>
             <a:r>
@@ -2663,7 +2472,7 @@
           <a:bodyPr wrap="square" lIns="0" tIns="0" rIns="0" bIns="0" rtlCol="0" anchor="ctr"/>
           <a:lstStyle/>
           <a:p>
-            <a:pPr indent="0" marL="0">
+            <a:pPr marL="0" indent="0">
               <a:buNone/>
             </a:pPr>
             <a:r>
@@ -2674,9 +2483,6 @@
               </a:rPr>
               <a:t>•  </a:t>
             </a:r>
-            <a:pPr indent="0" marL="0">
-              <a:buNone/>
-            </a:pPr>
             <a:r>
               <a:rPr lang="en-US" sz="1400" dirty="0">
                 <a:solidFill>
@@ -2713,7 +2519,7 @@
           <a:bodyPr wrap="square" lIns="0" tIns="0" rIns="0" bIns="0" rtlCol="0" anchor="ctr"/>
           <a:lstStyle/>
           <a:p>
-            <a:pPr indent="0" marL="0">
+            <a:pPr marL="0" indent="0">
               <a:buNone/>
             </a:pPr>
             <a:r>
@@ -2724,9 +2530,6 @@
               </a:rPr>
               <a:t>•  </a:t>
             </a:r>
-            <a:pPr indent="0" marL="0">
-              <a:buNone/>
-            </a:pPr>
             <a:r>
               <a:rPr lang="en-US" sz="1400" dirty="0">
                 <a:solidFill>
@@ -2763,7 +2566,7 @@
           <a:bodyPr wrap="square" lIns="0" tIns="0" rIns="0" bIns="0" rtlCol="0" anchor="ctr"/>
           <a:lstStyle/>
           <a:p>
-            <a:pPr indent="0" marL="0">
+            <a:pPr marL="0" indent="0">
               <a:buNone/>
             </a:pPr>
             <a:r>
@@ -2774,9 +2577,6 @@
               </a:rPr>
               <a:t>•  </a:t>
             </a:r>
-            <a:pPr indent="0" marL="0">
-              <a:buNone/>
-            </a:pPr>
             <a:r>
               <a:rPr lang="en-US" sz="1400" dirty="0">
                 <a:solidFill>
@@ -2811,6 +2611,13 @@
           </a:solidFill>
           <a:ln/>
         </p:spPr>
+        <p:txBody>
+          <a:bodyPr/>
+          <a:lstStyle/>
+          <a:p>
+            <a:endParaRPr lang="en-US"/>
+          </a:p>
+        </p:txBody>
       </p:sp>
       <p:sp>
         <p:nvSpPr>
@@ -2833,7 +2640,7 @@
           <a:bodyPr wrap="square" lIns="0" tIns="0" rIns="0" bIns="0" rtlCol="0" anchor="ctr"/>
           <a:lstStyle/>
           <a:p>
-            <a:pPr indent="0" marL="0">
+            <a:pPr marL="0" indent="0">
               <a:buNone/>
             </a:pPr>
             <a:r>
@@ -2872,7 +2679,7 @@
           <a:bodyPr wrap="square" lIns="0" tIns="0" rIns="0" bIns="0" rtlCol="0" anchor="ctr"/>
           <a:lstStyle/>
           <a:p>
-            <a:pPr indent="0" marL="0">
+            <a:pPr marL="0" indent="0">
               <a:buNone/>
             </a:pPr>
             <a:r>
@@ -2889,7 +2696,7 @@
             <a:endParaRPr lang="en-US" sz="1200" dirty="0"/>
           </a:p>
           <a:p>
-            <a:pPr indent="0" marL="0">
+            <a:pPr marL="0" indent="0">
               <a:buNone/>
             </a:pPr>
             <a:r>
@@ -2928,7 +2735,7 @@
           <a:bodyPr wrap="square" lIns="0" tIns="0" rIns="0" bIns="0" rtlCol="0" anchor="ctr"/>
           <a:lstStyle/>
           <a:p>
-            <a:pPr indent="0" marL="0">
+            <a:pPr marL="0" indent="0">
               <a:buNone/>
             </a:pPr>
             <a:r>
@@ -2967,7 +2774,7 @@
           <a:bodyPr wrap="square" lIns="0" tIns="0" rIns="0" bIns="0" rtlCol="0" anchor="ctr"/>
           <a:lstStyle/>
           <a:p>
-            <a:pPr algn="r" indent="0" marL="0">
+            <a:pPr marL="0" indent="0" algn="r">
               <a:buNone/>
             </a:pPr>
             <a:r>
@@ -3001,6 +2808,7 @@
         <a:solidFill>
           <a:srgbClr val="EEECE1"/>
         </a:solidFill>
+        <a:effectLst/>
       </p:bgPr>
     </p:bg>
     <p:spTree>
@@ -3036,6 +2844,13 @@
           </a:solidFill>
           <a:ln/>
         </p:spPr>
+        <p:txBody>
+          <a:bodyPr/>
+          <a:lstStyle/>
+          <a:p>
+            <a:endParaRPr lang="en-US"/>
+          </a:p>
+        </p:txBody>
       </p:sp>
       <p:sp>
         <p:nvSpPr>
@@ -3056,6 +2871,13 @@
           </a:solidFill>
           <a:ln/>
         </p:spPr>
+        <p:txBody>
+          <a:bodyPr/>
+          <a:lstStyle/>
+          <a:p>
+            <a:endParaRPr lang="en-US"/>
+          </a:p>
+        </p:txBody>
       </p:sp>
       <p:sp>
         <p:nvSpPr>
@@ -3076,6 +2898,13 @@
           </a:solidFill>
           <a:ln/>
         </p:spPr>
+        <p:txBody>
+          <a:bodyPr/>
+          <a:lstStyle/>
+          <a:p>
+            <a:endParaRPr lang="en-US"/>
+          </a:p>
+        </p:txBody>
       </p:sp>
       <p:sp>
         <p:nvSpPr>
@@ -3098,7 +2927,7 @@
           <a:bodyPr wrap="square" lIns="0" tIns="0" rIns="0" bIns="0" rtlCol="0" anchor="ctr"/>
           <a:lstStyle/>
           <a:p>
-            <a:pPr algn="ctr" indent="0" marL="0">
+            <a:pPr marL="0" indent="0" algn="ctr">
               <a:buNone/>
             </a:pPr>
             <a:r>
@@ -3137,7 +2966,7 @@
           <a:bodyPr wrap="square" lIns="0" tIns="0" rIns="0" bIns="0" rtlCol="0" anchor="ctr"/>
           <a:lstStyle/>
           <a:p>
-            <a:pPr indent="0" marL="0">
+            <a:pPr marL="0" indent="0">
               <a:buNone/>
             </a:pPr>
             <a:r>
@@ -3176,7 +3005,7 @@
           <a:bodyPr wrap="square" lIns="0" tIns="0" rIns="0" bIns="0" rtlCol="0" anchor="ctr"/>
           <a:lstStyle/>
           <a:p>
-            <a:pPr indent="0" marL="0">
+            <a:pPr marL="0" indent="0">
               <a:buNone/>
             </a:pPr>
             <a:r>
@@ -3187,9 +3016,6 @@
               </a:rPr>
               <a:t>•  </a:t>
             </a:r>
-            <a:pPr indent="0" marL="0">
-              <a:buNone/>
-            </a:pPr>
             <a:r>
               <a:rPr lang="en-US" sz="1400" dirty="0">
                 <a:solidFill>
@@ -3226,7 +3052,7 @@
           <a:bodyPr wrap="square" lIns="0" tIns="0" rIns="0" bIns="0" rtlCol="0" anchor="ctr"/>
           <a:lstStyle/>
           <a:p>
-            <a:pPr indent="0" marL="0">
+            <a:pPr marL="0" indent="0">
               <a:buNone/>
             </a:pPr>
             <a:r>
@@ -3237,9 +3063,6 @@
               </a:rPr>
               <a:t>•  </a:t>
             </a:r>
-            <a:pPr indent="0" marL="0">
-              <a:buNone/>
-            </a:pPr>
             <a:r>
               <a:rPr lang="en-US" sz="1400" dirty="0">
                 <a:solidFill>
@@ -3276,7 +3099,7 @@
           <a:bodyPr wrap="square" lIns="0" tIns="0" rIns="0" bIns="0" rtlCol="0" anchor="ctr"/>
           <a:lstStyle/>
           <a:p>
-            <a:pPr indent="0" marL="0">
+            <a:pPr marL="0" indent="0">
               <a:buNone/>
             </a:pPr>
             <a:r>
@@ -3287,9 +3110,6 @@
               </a:rPr>
               <a:t>•  </a:t>
             </a:r>
-            <a:pPr indent="0" marL="0">
-              <a:buNone/>
-            </a:pPr>
             <a:r>
               <a:rPr lang="en-US" sz="1400" dirty="0">
                 <a:solidFill>
@@ -3324,6 +3144,13 @@
           </a:solidFill>
           <a:ln/>
         </p:spPr>
+        <p:txBody>
+          <a:bodyPr/>
+          <a:lstStyle/>
+          <a:p>
+            <a:endParaRPr lang="en-US"/>
+          </a:p>
+        </p:txBody>
       </p:sp>
       <p:sp>
         <p:nvSpPr>
@@ -3346,7 +3173,7 @@
           <a:bodyPr wrap="square" lIns="0" tIns="0" rIns="0" bIns="0" rtlCol="0" anchor="ctr"/>
           <a:lstStyle/>
           <a:p>
-            <a:pPr indent="0" marL="0">
+            <a:pPr marL="0" indent="0">
               <a:buNone/>
             </a:pPr>
             <a:r>
@@ -3385,7 +3212,7 @@
           <a:bodyPr wrap="square" lIns="0" tIns="0" rIns="0" bIns="0" rtlCol="0" anchor="ctr"/>
           <a:lstStyle/>
           <a:p>
-            <a:pPr indent="0" marL="0">
+            <a:pPr marL="0" indent="0">
               <a:buNone/>
             </a:pPr>
             <a:r>
@@ -3402,7 +3229,7 @@
             <a:endParaRPr lang="en-US" sz="1200" dirty="0"/>
           </a:p>
           <a:p>
-            <a:pPr indent="0" marL="0">
+            <a:pPr marL="0" indent="0">
               <a:buNone/>
             </a:pPr>
             <a:r>
@@ -3441,7 +3268,7 @@
           <a:bodyPr wrap="square" lIns="0" tIns="0" rIns="0" bIns="0" rtlCol="0" anchor="ctr"/>
           <a:lstStyle/>
           <a:p>
-            <a:pPr indent="0" marL="0">
+            <a:pPr marL="0" indent="0">
               <a:buNone/>
             </a:pPr>
             <a:r>
@@ -3480,7 +3307,7 @@
           <a:bodyPr wrap="square" lIns="0" tIns="0" rIns="0" bIns="0" rtlCol="0" anchor="ctr"/>
           <a:lstStyle/>
           <a:p>
-            <a:pPr algn="r" indent="0" marL="0">
+            <a:pPr marL="0" indent="0" algn="r">
               <a:buNone/>
             </a:pPr>
             <a:r>
@@ -3514,6 +3341,7 @@
         <a:solidFill>
           <a:srgbClr val="EEECE1"/>
         </a:solidFill>
+        <a:effectLst/>
       </p:bgPr>
     </p:bg>
     <p:spTree>
@@ -3549,6 +3377,13 @@
           </a:solidFill>
           <a:ln/>
         </p:spPr>
+        <p:txBody>
+          <a:bodyPr/>
+          <a:lstStyle/>
+          <a:p>
+            <a:endParaRPr lang="en-US"/>
+          </a:p>
+        </p:txBody>
       </p:sp>
       <p:sp>
         <p:nvSpPr>
@@ -3571,7 +3406,7 @@
           <a:bodyPr wrap="square" lIns="0" tIns="0" rIns="0" bIns="0" rtlCol="0" anchor="ctr"/>
           <a:lstStyle/>
           <a:p>
-            <a:pPr indent="0" marL="0">
+            <a:pPr marL="0" indent="0">
               <a:buNone/>
             </a:pPr>
             <a:r>
@@ -3608,6 +3443,13 @@
           </a:solidFill>
           <a:ln/>
         </p:spPr>
+        <p:txBody>
+          <a:bodyPr/>
+          <a:lstStyle/>
+          <a:p>
+            <a:endParaRPr lang="en-US"/>
+          </a:p>
+        </p:txBody>
       </p:sp>
       <p:sp>
         <p:nvSpPr>
@@ -3630,7 +3472,7 @@
           <a:bodyPr wrap="square" lIns="0" tIns="0" rIns="0" bIns="0" rtlCol="0" anchor="ctr"/>
           <a:lstStyle/>
           <a:p>
-            <a:pPr algn="ctr" indent="0" marL="0">
+            <a:pPr marL="0" indent="0" algn="ctr">
               <a:buNone/>
             </a:pPr>
             <a:r>
@@ -3669,7 +3511,7 @@
           <a:bodyPr wrap="square" lIns="0" tIns="0" rIns="0" bIns="0" rtlCol="0" anchor="ctr"/>
           <a:lstStyle/>
           <a:p>
-            <a:pPr indent="0" marL="0">
+            <a:pPr marL="0" indent="0">
               <a:buNone/>
             </a:pPr>
             <a:r>
@@ -3708,7 +3550,7 @@
           <a:bodyPr wrap="square" lIns="0" tIns="0" rIns="0" bIns="0" rtlCol="0" anchor="ctr"/>
           <a:lstStyle/>
           <a:p>
-            <a:pPr indent="0" marL="0">
+            <a:pPr marL="0" indent="0">
               <a:buNone/>
             </a:pPr>
             <a:r>
@@ -3745,6 +3587,13 @@
           </a:solidFill>
           <a:ln/>
         </p:spPr>
+        <p:txBody>
+          <a:bodyPr/>
+          <a:lstStyle/>
+          <a:p>
+            <a:endParaRPr lang="en-US"/>
+          </a:p>
+        </p:txBody>
       </p:sp>
       <p:sp>
         <p:nvSpPr>
@@ -3765,6 +3614,13 @@
           </a:solidFill>
           <a:ln/>
         </p:spPr>
+        <p:txBody>
+          <a:bodyPr/>
+          <a:lstStyle/>
+          <a:p>
+            <a:endParaRPr lang="en-US"/>
+          </a:p>
+        </p:txBody>
       </p:sp>
       <p:sp>
         <p:nvSpPr>
@@ -3787,7 +3643,7 @@
           <a:bodyPr wrap="square" lIns="0" tIns="0" rIns="0" bIns="0" rtlCol="0" anchor="ctr"/>
           <a:lstStyle/>
           <a:p>
-            <a:pPr algn="ctr" indent="0" marL="0">
+            <a:pPr marL="0" indent="0" algn="ctr">
               <a:buNone/>
             </a:pPr>
             <a:r>
@@ -3826,7 +3682,7 @@
           <a:bodyPr wrap="square" lIns="0" tIns="0" rIns="0" bIns="0" rtlCol="0" anchor="ctr"/>
           <a:lstStyle/>
           <a:p>
-            <a:pPr indent="0" marL="0">
+            <a:pPr marL="0" indent="0">
               <a:buNone/>
             </a:pPr>
             <a:r>
@@ -3865,7 +3721,7 @@
           <a:bodyPr wrap="square" lIns="0" tIns="0" rIns="0" bIns="0" rtlCol="0" anchor="ctr"/>
           <a:lstStyle/>
           <a:p>
-            <a:pPr indent="0" marL="0">
+            <a:pPr marL="0" indent="0">
               <a:buNone/>
             </a:pPr>
             <a:r>
@@ -3902,6 +3758,13 @@
           </a:solidFill>
           <a:ln/>
         </p:spPr>
+        <p:txBody>
+          <a:bodyPr/>
+          <a:lstStyle/>
+          <a:p>
+            <a:endParaRPr lang="en-US"/>
+          </a:p>
+        </p:txBody>
       </p:sp>
       <p:sp>
         <p:nvSpPr>
@@ -3922,6 +3785,13 @@
           </a:solidFill>
           <a:ln/>
         </p:spPr>
+        <p:txBody>
+          <a:bodyPr/>
+          <a:lstStyle/>
+          <a:p>
+            <a:endParaRPr lang="en-US"/>
+          </a:p>
+        </p:txBody>
       </p:sp>
       <p:sp>
         <p:nvSpPr>
@@ -3944,7 +3814,7 @@
           <a:bodyPr wrap="square" lIns="0" tIns="0" rIns="0" bIns="0" rtlCol="0" anchor="ctr"/>
           <a:lstStyle/>
           <a:p>
-            <a:pPr algn="ctr" indent="0" marL="0">
+            <a:pPr marL="0" indent="0" algn="ctr">
               <a:buNone/>
             </a:pPr>
             <a:r>
@@ -3983,7 +3853,7 @@
           <a:bodyPr wrap="square" lIns="0" tIns="0" rIns="0" bIns="0" rtlCol="0" anchor="ctr"/>
           <a:lstStyle/>
           <a:p>
-            <a:pPr indent="0" marL="0">
+            <a:pPr marL="0" indent="0">
               <a:buNone/>
             </a:pPr>
             <a:r>
@@ -4022,7 +3892,7 @@
           <a:bodyPr wrap="square" lIns="0" tIns="0" rIns="0" bIns="0" rtlCol="0" anchor="ctr"/>
           <a:lstStyle/>
           <a:p>
-            <a:pPr indent="0" marL="0">
+            <a:pPr marL="0" indent="0">
               <a:buNone/>
             </a:pPr>
             <a:r>
@@ -4059,6 +3929,13 @@
           </a:solidFill>
           <a:ln/>
         </p:spPr>
+        <p:txBody>
+          <a:bodyPr/>
+          <a:lstStyle/>
+          <a:p>
+            <a:endParaRPr lang="en-US"/>
+          </a:p>
+        </p:txBody>
       </p:sp>
       <p:sp>
         <p:nvSpPr>
@@ -4079,6 +3956,13 @@
           </a:solidFill>
           <a:ln/>
         </p:spPr>
+        <p:txBody>
+          <a:bodyPr/>
+          <a:lstStyle/>
+          <a:p>
+            <a:endParaRPr lang="en-US"/>
+          </a:p>
+        </p:txBody>
       </p:sp>
       <p:sp>
         <p:nvSpPr>
@@ -4101,7 +3985,7 @@
           <a:bodyPr wrap="square" lIns="0" tIns="0" rIns="0" bIns="0" rtlCol="0" anchor="ctr"/>
           <a:lstStyle/>
           <a:p>
-            <a:pPr algn="ctr" indent="0" marL="0">
+            <a:pPr marL="0" indent="0" algn="ctr">
               <a:buNone/>
             </a:pPr>
             <a:r>
@@ -4140,7 +4024,7 @@
           <a:bodyPr wrap="square" lIns="0" tIns="0" rIns="0" bIns="0" rtlCol="0" anchor="ctr"/>
           <a:lstStyle/>
           <a:p>
-            <a:pPr indent="0" marL="0">
+            <a:pPr marL="0" indent="0">
               <a:buNone/>
             </a:pPr>
             <a:r>
@@ -4179,7 +4063,7 @@
           <a:bodyPr wrap="square" lIns="0" tIns="0" rIns="0" bIns="0" rtlCol="0" anchor="ctr"/>
           <a:lstStyle/>
           <a:p>
-            <a:pPr indent="0" marL="0">
+            <a:pPr marL="0" indent="0">
               <a:buNone/>
             </a:pPr>
             <a:r>
@@ -4216,6 +4100,13 @@
           </a:solidFill>
           <a:ln/>
         </p:spPr>
+        <p:txBody>
+          <a:bodyPr/>
+          <a:lstStyle/>
+          <a:p>
+            <a:endParaRPr lang="en-US"/>
+          </a:p>
+        </p:txBody>
       </p:sp>
       <p:sp>
         <p:nvSpPr>
@@ -4238,7 +4129,7 @@
           <a:bodyPr wrap="square" lIns="0" tIns="0" rIns="0" bIns="0" rtlCol="0" anchor="ctr"/>
           <a:lstStyle/>
           <a:p>
-            <a:pPr indent="0" marL="0">
+            <a:pPr marL="0" indent="0">
               <a:buNone/>
             </a:pPr>
             <a:r>
@@ -4252,9 +4143,6 @@
               </a:rPr>
               <a:t>Your next step: </a:t>
             </a:r>
-            <a:pPr indent="0" marL="0">
-              <a:buNone/>
-            </a:pPr>
             <a:r>
               <a:rPr lang="en-US" sz="1200" dirty="0">
                 <a:solidFill>
@@ -4291,7 +4179,7 @@
           <a:bodyPr wrap="square" lIns="0" tIns="0" rIns="0" bIns="0" rtlCol="0" anchor="ctr"/>
           <a:lstStyle/>
           <a:p>
-            <a:pPr algn="r" indent="0" marL="0">
+            <a:pPr marL="0" indent="0" algn="r">
               <a:buNone/>
             </a:pPr>
             <a:r>
@@ -4325,6 +4213,7 @@
         <a:solidFill>
           <a:srgbClr val="EEECE1"/>
         </a:solidFill>
+        <a:effectLst/>
       </p:bgPr>
     </p:bg>
     <p:spTree>
@@ -4360,6 +4249,13 @@
           </a:solidFill>
           <a:ln/>
         </p:spPr>
+        <p:txBody>
+          <a:bodyPr/>
+          <a:lstStyle/>
+          <a:p>
+            <a:endParaRPr lang="en-US"/>
+          </a:p>
+        </p:txBody>
       </p:sp>
       <p:sp>
         <p:nvSpPr>
@@ -4382,7 +4278,7 @@
           <a:bodyPr wrap="square" lIns="0" tIns="0" rIns="0" bIns="0" rtlCol="0" anchor="ctr"/>
           <a:lstStyle/>
           <a:p>
-            <a:pPr indent="0" marL="0">
+            <a:pPr marL="0" indent="0">
               <a:buNone/>
             </a:pPr>
             <a:r>
@@ -4421,7 +4317,7 @@
           <a:bodyPr wrap="square" lIns="0" tIns="0" rIns="0" bIns="0" rtlCol="0" anchor="ctr"/>
           <a:lstStyle/>
           <a:p>
-            <a:pPr indent="0" marL="0">
+            <a:pPr marL="0" indent="0">
               <a:buNone/>
             </a:pPr>
             <a:r>
@@ -4460,7 +4356,7 @@
           <a:bodyPr wrap="square" lIns="0" tIns="0" rIns="0" bIns="0" rtlCol="0" anchor="ctr"/>
           <a:lstStyle/>
           <a:p>
-            <a:pPr indent="0" marL="0">
+            <a:pPr marL="0" indent="0">
               <a:buNone/>
             </a:pPr>
             <a:r>
@@ -4477,7 +4373,7 @@
             <a:endParaRPr lang="en-US" sz="1400" dirty="0"/>
           </a:p>
           <a:p>
-            <a:pPr indent="0" marL="0">
+            <a:pPr marL="0" indent="0">
               <a:buNone/>
             </a:pPr>
             <a:r>
@@ -4514,6 +4410,13 @@
           </a:solidFill>
           <a:ln/>
         </p:spPr>
+        <p:txBody>
+          <a:bodyPr/>
+          <a:lstStyle/>
+          <a:p>
+            <a:endParaRPr lang="en-US"/>
+          </a:p>
+        </p:txBody>
       </p:sp>
       <p:sp>
         <p:nvSpPr>
@@ -4536,7 +4439,7 @@
           <a:bodyPr wrap="square" lIns="0" tIns="0" rIns="0" bIns="0" rtlCol="0" anchor="ctr"/>
           <a:lstStyle/>
           <a:p>
-            <a:pPr indent="0" marL="0">
+            <a:pPr marL="0" indent="0">
               <a:buNone/>
             </a:pPr>
             <a:r>
@@ -4575,7 +4478,7 @@
           <a:bodyPr wrap="square" lIns="0" tIns="0" rIns="0" bIns="0" rtlCol="0" anchor="ctr"/>
           <a:lstStyle/>
           <a:p>
-            <a:pPr indent="0" marL="0">
+            <a:pPr marL="0" indent="0">
               <a:buNone/>
             </a:pPr>
             <a:r>
@@ -4592,7 +4495,7 @@
             <a:endParaRPr lang="en-US" sz="1100" dirty="0"/>
           </a:p>
           <a:p>
-            <a:pPr indent="0" marL="0">
+            <a:pPr marL="0" indent="0">
               <a:buNone/>
             </a:pPr>
             <a:r>
@@ -4631,11 +4534,114 @@
           <a:bodyPr wrap="square" lIns="0" tIns="0" rIns="0" bIns="0" rtlCol="0" anchor="ctr"/>
           <a:lstStyle/>
           <a:p>
-            <a:pPr indent="0" marL="0">
-              <a:buNone/>
-            </a:pPr>
-            <a:r>
-              <a:rPr lang="en-US" sz="1200" b="1" dirty="0">
+            <a:r>
+              <a:rPr lang="en-US" sz="1600" b="1" dirty="0">
+                <a:solidFill>
+                  <a:schemeClr val="bg1"/>
+                </a:solidFill>
+                <a:latin typeface="Arial" pitchFamily="34" charset="0"/>
+                <a:ea typeface="Arial" pitchFamily="34" charset="-122"/>
+                <a:cs typeface="Arial" pitchFamily="34" charset="-120"/>
+                <a:hlinkClick r:id="rId3">
+                  <a:extLst>
+                    <a:ext uri="{A12FA001-AC4F-418D-AE19-62706E023703}">
+                      <ahyp:hlinkClr xmlns:ahyp="http://schemas.microsoft.com/office/drawing/2018/hyperlinkcolor" val="tx"/>
+                    </a:ext>
+                  </a:extLst>
+                </a:hlinkClick>
+              </a:rPr>
+              <a:t>https://swiy.co/Meonske26</a:t>
+            </a:r>
+            <a:endParaRPr lang="en-US" sz="1600" b="1" dirty="0">
+              <a:solidFill>
+                <a:schemeClr val="bg1"/>
+              </a:solidFill>
+            </a:endParaRPr>
+          </a:p>
+        </p:txBody>
+      </p:sp>
+      <p:sp>
+        <p:nvSpPr>
+          <p:cNvPr id="10" name="Text 8"/>
+          <p:cNvSpPr/>
+          <p:nvPr/>
+        </p:nvSpPr>
+        <p:spPr>
+          <a:xfrm>
+            <a:off x="868680" y="4315968"/>
+            <a:ext cx="4389120" cy="320040"/>
+          </a:xfrm>
+          <a:prstGeom prst="rect">
+            <a:avLst/>
+          </a:prstGeom>
+          <a:noFill/>
+          <a:ln/>
+        </p:spPr>
+        <p:txBody>
+          <a:bodyPr wrap="square" lIns="0" tIns="0" rIns="0" bIns="0" rtlCol="0" anchor="ctr"/>
+          <a:lstStyle/>
+          <a:p>
+            <a:pPr marL="0" indent="0">
+              <a:buNone/>
+            </a:pPr>
+            <a:r>
+              <a:rPr lang="en-US" sz="1000" i="1" dirty="0">
+                <a:solidFill>
+                  <a:srgbClr val="FFFFFF"/>
+                </a:solidFill>
+                <a:latin typeface="Arial" pitchFamily="34" charset="0"/>
+                <a:ea typeface="Arial" pitchFamily="34" charset="-122"/>
+                <a:cs typeface="Arial" pitchFamily="34" charset="-120"/>
+              </a:rPr>
+              <a:t>I also work with teams on Excel training</a:t>
+            </a:r>
+            <a:endParaRPr lang="en-US" sz="1000" dirty="0"/>
+          </a:p>
+          <a:p>
+            <a:pPr marL="0" indent="0">
+              <a:buNone/>
+            </a:pPr>
+            <a:r>
+              <a:rPr lang="en-US" sz="1000" i="1" dirty="0">
+                <a:solidFill>
+                  <a:srgbClr val="FFFFFF"/>
+                </a:solidFill>
+                <a:latin typeface="Arial" pitchFamily="34" charset="0"/>
+                <a:ea typeface="Arial" pitchFamily="34" charset="-122"/>
+                <a:cs typeface="Arial" pitchFamily="34" charset="-120"/>
+              </a:rPr>
+              <a:t>and AI adoption. Happy to chat.</a:t>
+            </a:r>
+            <a:endParaRPr lang="en-US" sz="1000" dirty="0"/>
+          </a:p>
+        </p:txBody>
+      </p:sp>
+      <p:sp>
+        <p:nvSpPr>
+          <p:cNvPr id="11" name="Text 9"/>
+          <p:cNvSpPr/>
+          <p:nvPr/>
+        </p:nvSpPr>
+        <p:spPr>
+          <a:xfrm>
+            <a:off x="6126480" y="1371600"/>
+            <a:ext cx="2834640" cy="2286000"/>
+          </a:xfrm>
+          <a:prstGeom prst="rect">
+            <a:avLst/>
+          </a:prstGeom>
+          <a:noFill/>
+          <a:ln/>
+        </p:spPr>
+        <p:txBody>
+          <a:bodyPr wrap="square" lIns="0" tIns="0" rIns="0" bIns="0" rtlCol="0" anchor="ctr"/>
+          <a:lstStyle/>
+          <a:p>
+            <a:pPr marL="0" indent="0" algn="ctr">
+              <a:buNone/>
+            </a:pPr>
+            <a:r>
+              <a:rPr lang="en-US" sz="2600" b="1" dirty="0">
                 <a:solidFill>
                   <a:srgbClr val="FFFFFF"/>
                 </a:solidFill>
@@ -4643,94 +4649,16 @@
                 <a:ea typeface="Arial Black" pitchFamily="34" charset="-122"/>
                 <a:cs typeface="Arial Black" pitchFamily="34" charset="-120"/>
               </a:rPr>
-              <a:t>stringfestanalytics.com/meonske-2026</a:t>
-            </a:r>
-            <a:endParaRPr lang="en-US" sz="1200" dirty="0"/>
-          </a:p>
-        </p:txBody>
-      </p:sp>
-      <p:sp>
-        <p:nvSpPr>
-          <p:cNvPr id="10" name="Text 8"/>
-          <p:cNvSpPr/>
-          <p:nvPr/>
-        </p:nvSpPr>
-        <p:spPr>
-          <a:xfrm>
-            <a:off x="868680" y="4315968"/>
-            <a:ext cx="4389120" cy="320040"/>
-          </a:xfrm>
-          <a:prstGeom prst="rect">
-            <a:avLst/>
-          </a:prstGeom>
-          <a:noFill/>
-          <a:ln/>
-        </p:spPr>
-        <p:txBody>
-          <a:bodyPr wrap="square" lIns="0" tIns="0" rIns="0" bIns="0" rtlCol="0" anchor="ctr"/>
-          <a:lstStyle/>
-          <a:p>
-            <a:pPr indent="0" marL="0">
-              <a:buNone/>
-            </a:pPr>
-            <a:r>
-              <a:rPr lang="en-US" sz="1000" i="1" dirty="0">
-                <a:solidFill>
-                  <a:srgbClr val="FFFFFF"/>
-                </a:solidFill>
-                <a:latin typeface="Arial" pitchFamily="34" charset="0"/>
-                <a:ea typeface="Arial" pitchFamily="34" charset="-122"/>
-                <a:cs typeface="Arial" pitchFamily="34" charset="-120"/>
-              </a:rPr>
-              <a:t>I also work with teams on Excel training</a:t>
-            </a:r>
-            <a:endParaRPr lang="en-US" sz="1000" dirty="0"/>
-          </a:p>
-          <a:p>
-            <a:pPr indent="0" marL="0">
-              <a:buNone/>
-            </a:pPr>
-            <a:r>
-              <a:rPr lang="en-US" sz="1000" i="1" dirty="0">
-                <a:solidFill>
-                  <a:srgbClr val="FFFFFF"/>
-                </a:solidFill>
-                <a:latin typeface="Arial" pitchFamily="34" charset="0"/>
-                <a:ea typeface="Arial" pitchFamily="34" charset="-122"/>
-                <a:cs typeface="Arial" pitchFamily="34" charset="-120"/>
-              </a:rPr>
-              <a:t>and AI adoption — happy to chat.</a:t>
-            </a:r>
-            <a:endParaRPr lang="en-US" sz="1000" dirty="0"/>
-          </a:p>
-        </p:txBody>
-      </p:sp>
-      <p:sp>
-        <p:nvSpPr>
-          <p:cNvPr id="11" name="Text 9"/>
-          <p:cNvSpPr/>
-          <p:nvPr/>
-        </p:nvSpPr>
-        <p:spPr>
-          <a:xfrm>
-            <a:off x="6126480" y="1371600"/>
-            <a:ext cx="2834640" cy="2286000"/>
-          </a:xfrm>
-          <a:prstGeom prst="rect">
-            <a:avLst/>
-          </a:prstGeom>
-          <a:noFill/>
-          <a:ln/>
-        </p:spPr>
-        <p:txBody>
-          <a:bodyPr wrap="square" lIns="0" tIns="0" rIns="0" bIns="0" rtlCol="0" anchor="ctr"/>
-          <a:lstStyle/>
-          <a:p>
-            <a:pPr algn="ctr" indent="0" marL="0">
-              <a:buNone/>
-            </a:pPr>
-            <a:r>
-              <a:rPr lang="en-US" sz="2600" b="1" dirty="0">
+              <a:t>See you in</a:t>
+            </a:r>
+            <a:endParaRPr lang="en-US" sz="2600" dirty="0"/>
+          </a:p>
+          <a:p>
+            <a:pPr marL="0" indent="0" algn="ctr">
+              <a:buNone/>
+            </a:pPr>
+            <a:r>
+              <a:rPr lang="en-US" sz="2600" b="1">
                 <a:solidFill>
                   <a:srgbClr val="FFFFFF"/>
                 </a:solidFill>
@@ -4738,41 +4666,7 @@
                 <a:ea typeface="Arial Black" pitchFamily="34" charset="-122"/>
                 <a:cs typeface="Arial Black" pitchFamily="34" charset="-120"/>
               </a:rPr>
-              <a:t>See you in</a:t>
-            </a:r>
-            <a:endParaRPr lang="en-US" sz="2600" dirty="0"/>
-          </a:p>
-          <a:p>
-            <a:pPr algn="ctr" indent="0" marL="0">
-              <a:buNone/>
-            </a:pPr>
-            <a:r>
-              <a:rPr lang="en-US" sz="2600" b="1" dirty="0">
-                <a:solidFill>
-                  <a:srgbClr val="FFFFFF"/>
-                </a:solidFill>
-                <a:latin typeface="Arial Black" pitchFamily="34" charset="0"/>
-                <a:ea typeface="Arial Black" pitchFamily="34" charset="-122"/>
-                <a:cs typeface="Arial Black" pitchFamily="34" charset="-120"/>
-              </a:rPr>
-              <a:t>the Power</a:t>
-            </a:r>
-            <a:endParaRPr lang="en-US" sz="2600" dirty="0"/>
-          </a:p>
-          <a:p>
-            <a:pPr algn="ctr" indent="0" marL="0">
-              <a:buNone/>
-            </a:pPr>
-            <a:r>
-              <a:rPr lang="en-US" sz="2600" b="1" dirty="0">
-                <a:solidFill>
-                  <a:srgbClr val="FFFFFF"/>
-                </a:solidFill>
-                <a:latin typeface="Arial Black" pitchFamily="34" charset="0"/>
-                <a:ea typeface="Arial Black" pitchFamily="34" charset="-122"/>
-                <a:cs typeface="Arial Black" pitchFamily="34" charset="-120"/>
-              </a:rPr>
-              <a:t>Query lab!</a:t>
+              <a:t>the lab!</a:t>
             </a:r>
             <a:endParaRPr lang="en-US" sz="2600" dirty="0"/>
           </a:p>
@@ -4794,6 +4688,7 @@
         <a:solidFill>
           <a:srgbClr val="C00000"/>
         </a:solidFill>
+        <a:effectLst/>
       </p:bgPr>
     </p:bg>
     <p:spTree>
@@ -4831,7 +4726,7 @@
           <a:bodyPr wrap="square" lIns="0" tIns="0" rIns="0" bIns="0" rtlCol="0" anchor="ctr"/>
           <a:lstStyle/>
           <a:p>
-            <a:pPr algn="ctr" indent="0" marL="0">
+            <a:pPr marL="0" indent="0" algn="ctr">
               <a:buNone/>
             </a:pPr>
             <a:r>
@@ -4870,7 +4765,7 @@
           <a:bodyPr wrap="square" lIns="0" tIns="0" rIns="0" bIns="0" rtlCol="0" anchor="ctr"/>
           <a:lstStyle/>
           <a:p>
-            <a:pPr algn="ctr" indent="0" marL="0">
+            <a:pPr marL="0" indent="0" algn="ctr">
               <a:buNone/>
             </a:pPr>
             <a:r>
@@ -4904,6 +4799,7 @@
         <a:solidFill>
           <a:srgbClr val="C00000"/>
         </a:solidFill>
+        <a:effectLst/>
       </p:bgPr>
     </p:bg>
     <p:spTree>
@@ -4941,7 +4837,7 @@
           <a:bodyPr wrap="square" lIns="0" tIns="0" rIns="0" bIns="0" rtlCol="0" anchor="ctr"/>
           <a:lstStyle/>
           <a:p>
-            <a:pPr indent="0" marL="0">
+            <a:pPr marL="0" indent="0">
               <a:buNone/>
             </a:pPr>
             <a:r>
@@ -4980,7 +4876,7 @@
           <a:bodyPr wrap="square" lIns="0" tIns="0" rIns="0" bIns="0" rtlCol="0" anchor="ctr"/>
           <a:lstStyle/>
           <a:p>
-            <a:pPr indent="0" marL="0">
+            <a:pPr marL="0" indent="0">
               <a:buNone/>
             </a:pPr>
             <a:r>
@@ -4997,7 +4893,7 @@
             <a:endParaRPr lang="en-US" sz="1500" dirty="0"/>
           </a:p>
           <a:p>
-            <a:pPr indent="0" marL="0">
+            <a:pPr marL="0" indent="0">
               <a:buNone/>
             </a:pPr>
             <a:r>
@@ -5036,7 +4932,7 @@
           <a:bodyPr wrap="square" lIns="0" tIns="0" rIns="0" bIns="0" rtlCol="0" anchor="ctr"/>
           <a:lstStyle/>
           <a:p>
-            <a:pPr indent="0" marL="0">
+            <a:pPr marL="0" indent="0">
               <a:buNone/>
             </a:pPr>
             <a:r>
@@ -5073,6 +4969,13 @@
           </a:solidFill>
           <a:ln/>
         </p:spPr>
+        <p:txBody>
+          <a:bodyPr/>
+          <a:lstStyle/>
+          <a:p>
+            <a:endParaRPr lang="en-US"/>
+          </a:p>
+        </p:txBody>
       </p:sp>
       <p:sp>
         <p:nvSpPr>
@@ -5093,6 +4996,13 @@
           </a:solidFill>
           <a:ln/>
         </p:spPr>
+        <p:txBody>
+          <a:bodyPr/>
+          <a:lstStyle/>
+          <a:p>
+            <a:endParaRPr lang="en-US"/>
+          </a:p>
+        </p:txBody>
       </p:sp>
       <p:sp>
         <p:nvSpPr>
@@ -5115,7 +5025,7 @@
           <a:bodyPr wrap="square" lIns="0" tIns="0" rIns="0" bIns="0" rtlCol="0" anchor="ctr"/>
           <a:lstStyle/>
           <a:p>
-            <a:pPr indent="0" marL="0">
+            <a:pPr marL="0" indent="0">
               <a:buNone/>
             </a:pPr>
             <a:r>
@@ -5154,7 +5064,7 @@
           <a:bodyPr wrap="square" lIns="0" tIns="0" rIns="0" bIns="0" rtlCol="0" anchor="ctr"/>
           <a:lstStyle/>
           <a:p>
-            <a:pPr indent="0" marL="0">
+            <a:pPr marL="0" indent="0">
               <a:buNone/>
             </a:pPr>
             <a:r>
@@ -5171,7 +5081,7 @@
             <a:endParaRPr lang="en-US" sz="1200" dirty="0"/>
           </a:p>
           <a:p>
-            <a:pPr indent="0" marL="0">
+            <a:pPr marL="0" indent="0">
               <a:buNone/>
             </a:pPr>
             <a:r>
@@ -5188,7 +5098,7 @@
             <a:endParaRPr lang="en-US" sz="1200" dirty="0"/>
           </a:p>
           <a:p>
-            <a:pPr indent="0" marL="0">
+            <a:pPr marL="0" indent="0">
               <a:buNone/>
             </a:pPr>
             <a:r>
@@ -5225,6 +5135,13 @@
           </a:solidFill>
           <a:ln/>
         </p:spPr>
+        <p:txBody>
+          <a:bodyPr/>
+          <a:lstStyle/>
+          <a:p>
+            <a:endParaRPr lang="en-US"/>
+          </a:p>
+        </p:txBody>
       </p:sp>
       <p:sp>
         <p:nvSpPr>
@@ -5245,6 +5162,13 @@
           </a:solidFill>
           <a:ln/>
         </p:spPr>
+        <p:txBody>
+          <a:bodyPr/>
+          <a:lstStyle/>
+          <a:p>
+            <a:endParaRPr lang="en-US"/>
+          </a:p>
+        </p:txBody>
       </p:sp>
       <p:sp>
         <p:nvSpPr>
@@ -5267,7 +5191,7 @@
           <a:bodyPr wrap="square" lIns="0" tIns="0" rIns="0" bIns="0" rtlCol="0" anchor="ctr"/>
           <a:lstStyle/>
           <a:p>
-            <a:pPr indent="0" marL="0">
+            <a:pPr marL="0" indent="0">
               <a:buNone/>
             </a:pPr>
             <a:r>
@@ -5306,7 +5230,7 @@
           <a:bodyPr wrap="square" lIns="0" tIns="0" rIns="0" bIns="0" rtlCol="0" anchor="ctr"/>
           <a:lstStyle/>
           <a:p>
-            <a:pPr indent="0" marL="0">
+            <a:pPr marL="0" indent="0">
               <a:buNone/>
             </a:pPr>
             <a:r>
@@ -5323,7 +5247,7 @@
             <a:endParaRPr lang="en-US" sz="1200" dirty="0"/>
           </a:p>
           <a:p>
-            <a:pPr indent="0" marL="0">
+            <a:pPr marL="0" indent="0">
               <a:buNone/>
             </a:pPr>
             <a:r>
@@ -5360,6 +5284,13 @@
           </a:solidFill>
           <a:ln/>
         </p:spPr>
+        <p:txBody>
+          <a:bodyPr/>
+          <a:lstStyle/>
+          <a:p>
+            <a:endParaRPr lang="en-US"/>
+          </a:p>
+        </p:txBody>
       </p:sp>
       <p:sp>
         <p:nvSpPr>
@@ -5380,6 +5311,13 @@
           </a:solidFill>
           <a:ln/>
         </p:spPr>
+        <p:txBody>
+          <a:bodyPr/>
+          <a:lstStyle/>
+          <a:p>
+            <a:endParaRPr lang="en-US"/>
+          </a:p>
+        </p:txBody>
       </p:sp>
       <p:sp>
         <p:nvSpPr>
@@ -5402,7 +5340,7 @@
           <a:bodyPr wrap="square" lIns="0" tIns="0" rIns="0" bIns="0" rtlCol="0" anchor="ctr"/>
           <a:lstStyle/>
           <a:p>
-            <a:pPr indent="0" marL="0">
+            <a:pPr marL="0" indent="0">
               <a:buNone/>
             </a:pPr>
             <a:r>
@@ -5441,7 +5379,7 @@
           <a:bodyPr wrap="square" lIns="0" tIns="0" rIns="0" bIns="0" rtlCol="0" anchor="ctr"/>
           <a:lstStyle/>
           <a:p>
-            <a:pPr indent="0" marL="0">
+            <a:pPr marL="0" indent="0">
               <a:buNone/>
             </a:pPr>
             <a:r>
@@ -5458,7 +5396,7 @@
             <a:endParaRPr lang="en-US" sz="1200" dirty="0"/>
           </a:p>
           <a:p>
-            <a:pPr indent="0" marL="0">
+            <a:pPr marL="0" indent="0">
               <a:buNone/>
             </a:pPr>
             <a:r>
@@ -5492,6 +5430,7 @@
         <a:solidFill>
           <a:srgbClr val="EEECE1"/>
         </a:solidFill>
+        <a:effectLst/>
       </p:bgPr>
     </p:bg>
     <p:spTree>
@@ -5527,6 +5466,13 @@
           </a:solidFill>
           <a:ln/>
         </p:spPr>
+        <p:txBody>
+          <a:bodyPr/>
+          <a:lstStyle/>
+          <a:p>
+            <a:endParaRPr lang="en-US"/>
+          </a:p>
+        </p:txBody>
       </p:sp>
       <p:sp>
         <p:nvSpPr>
@@ -5549,7 +5495,7 @@
           <a:bodyPr wrap="square" lIns="0" tIns="0" rIns="0" bIns="0" rtlCol="0" anchor="ctr"/>
           <a:lstStyle/>
           <a:p>
-            <a:pPr indent="0" marL="0">
+            <a:pPr marL="0" indent="0">
               <a:buNone/>
             </a:pPr>
             <a:r>
@@ -5586,6 +5532,13 @@
           </a:solidFill>
           <a:ln/>
         </p:spPr>
+        <p:txBody>
+          <a:bodyPr/>
+          <a:lstStyle/>
+          <a:p>
+            <a:endParaRPr lang="en-US"/>
+          </a:p>
+        </p:txBody>
       </p:sp>
       <p:sp>
         <p:nvSpPr>
@@ -5608,7 +5561,7 @@
           <a:bodyPr wrap="square" lIns="0" tIns="0" rIns="0" bIns="0" rtlCol="0" anchor="ctr"/>
           <a:lstStyle/>
           <a:p>
-            <a:pPr algn="ctr" indent="0" marL="0">
+            <a:pPr marL="0" indent="0" algn="ctr">
               <a:buNone/>
             </a:pPr>
             <a:r>
@@ -5647,7 +5600,7 @@
           <a:bodyPr wrap="square" lIns="0" tIns="0" rIns="0" bIns="0" rtlCol="0" anchor="ctr"/>
           <a:lstStyle/>
           <a:p>
-            <a:pPr indent="0" marL="0">
+            <a:pPr marL="0" indent="0">
               <a:buNone/>
             </a:pPr>
             <a:r>
@@ -5684,6 +5637,13 @@
           </a:solidFill>
           <a:ln/>
         </p:spPr>
+        <p:txBody>
+          <a:bodyPr/>
+          <a:lstStyle/>
+          <a:p>
+            <a:endParaRPr lang="en-US"/>
+          </a:p>
+        </p:txBody>
       </p:sp>
       <p:sp>
         <p:nvSpPr>
@@ -5706,7 +5666,7 @@
           <a:bodyPr wrap="square" lIns="0" tIns="0" rIns="0" bIns="0" rtlCol="0" anchor="ctr"/>
           <a:lstStyle/>
           <a:p>
-            <a:pPr algn="ctr" indent="0" marL="0">
+            <a:pPr marL="0" indent="0" algn="ctr">
               <a:buNone/>
             </a:pPr>
             <a:r>
@@ -5745,7 +5705,7 @@
           <a:bodyPr wrap="square" lIns="0" tIns="0" rIns="0" bIns="0" rtlCol="0" anchor="ctr"/>
           <a:lstStyle/>
           <a:p>
-            <a:pPr indent="0" marL="0">
+            <a:pPr marL="0" indent="0">
               <a:buNone/>
             </a:pPr>
             <a:r>
@@ -5782,6 +5742,13 @@
           </a:solidFill>
           <a:ln/>
         </p:spPr>
+        <p:txBody>
+          <a:bodyPr/>
+          <a:lstStyle/>
+          <a:p>
+            <a:endParaRPr lang="en-US"/>
+          </a:p>
+        </p:txBody>
       </p:sp>
       <p:sp>
         <p:nvSpPr>
@@ -5804,7 +5771,7 @@
           <a:bodyPr wrap="square" lIns="0" tIns="0" rIns="0" bIns="0" rtlCol="0" anchor="ctr"/>
           <a:lstStyle/>
           <a:p>
-            <a:pPr algn="ctr" indent="0" marL="0">
+            <a:pPr marL="0" indent="0" algn="ctr">
               <a:buNone/>
             </a:pPr>
             <a:r>
@@ -5843,7 +5810,7 @@
           <a:bodyPr wrap="square" lIns="0" tIns="0" rIns="0" bIns="0" rtlCol="0" anchor="ctr"/>
           <a:lstStyle/>
           <a:p>
-            <a:pPr indent="0" marL="0">
+            <a:pPr marL="0" indent="0">
               <a:buNone/>
             </a:pPr>
             <a:r>
@@ -5880,6 +5847,13 @@
           </a:solidFill>
           <a:ln/>
         </p:spPr>
+        <p:txBody>
+          <a:bodyPr/>
+          <a:lstStyle/>
+          <a:p>
+            <a:endParaRPr lang="en-US"/>
+          </a:p>
+        </p:txBody>
       </p:sp>
       <p:sp>
         <p:nvSpPr>
@@ -5902,7 +5876,7 @@
           <a:bodyPr wrap="square" lIns="0" tIns="0" rIns="0" bIns="0" rtlCol="0" anchor="ctr"/>
           <a:lstStyle/>
           <a:p>
-            <a:pPr algn="ctr" indent="0" marL="0">
+            <a:pPr marL="0" indent="0" algn="ctr">
               <a:buNone/>
             </a:pPr>
             <a:r>
@@ -5941,7 +5915,7 @@
           <a:bodyPr wrap="square" lIns="0" tIns="0" rIns="0" bIns="0" rtlCol="0" anchor="ctr"/>
           <a:lstStyle/>
           <a:p>
-            <a:pPr indent="0" marL="0">
+            <a:pPr marL="0" indent="0">
               <a:buNone/>
             </a:pPr>
             <a:r>
@@ -5978,6 +5952,13 @@
           </a:solidFill>
           <a:ln/>
         </p:spPr>
+        <p:txBody>
+          <a:bodyPr/>
+          <a:lstStyle/>
+          <a:p>
+            <a:endParaRPr lang="en-US"/>
+          </a:p>
+        </p:txBody>
       </p:sp>
       <p:sp>
         <p:nvSpPr>
@@ -6000,7 +5981,7 @@
           <a:bodyPr wrap="square" lIns="0" tIns="0" rIns="0" bIns="0" rtlCol="0" anchor="ctr"/>
           <a:lstStyle/>
           <a:p>
-            <a:pPr algn="ctr" indent="0" marL="0">
+            <a:pPr marL="0" indent="0" algn="ctr">
               <a:buNone/>
             </a:pPr>
             <a:r>
@@ -6039,7 +6020,7 @@
           <a:bodyPr wrap="square" lIns="0" tIns="0" rIns="0" bIns="0" rtlCol="0" anchor="ctr"/>
           <a:lstStyle/>
           <a:p>
-            <a:pPr indent="0" marL="0">
+            <a:pPr marL="0" indent="0">
               <a:buNone/>
             </a:pPr>
             <a:r>
@@ -6078,7 +6059,7 @@
           <a:bodyPr wrap="square" lIns="0" tIns="0" rIns="0" bIns="0" rtlCol="0" anchor="ctr"/>
           <a:lstStyle/>
           <a:p>
-            <a:pPr algn="r" indent="0" marL="0">
+            <a:pPr marL="0" indent="0" algn="r">
               <a:buNone/>
             </a:pPr>
             <a:r>
@@ -6093,6 +6074,82 @@
               <a:t>Stringfest Analytics</a:t>
             </a:r>
             <a:endParaRPr lang="en-US" sz="900" dirty="0"/>
+          </a:p>
+        </p:txBody>
+      </p:sp>
+      <p:sp>
+        <p:nvSpPr>
+          <p:cNvPr id="21" name="Text 18">
+            <a:extLst>
+              <a:ext uri="{FF2B5EF4-FFF2-40B4-BE49-F238E27FC236}">
+                <a16:creationId xmlns:a16="http://schemas.microsoft.com/office/drawing/2014/main" id="{05650FD2-07BF-64EC-5BEF-4260E513DA2A}"/>
+              </a:ext>
+            </a:extLst>
+          </p:cNvPr>
+          <p:cNvSpPr/>
+          <p:nvPr/>
+        </p:nvSpPr>
+        <p:spPr>
+          <a:xfrm>
+            <a:off x="640080" y="4572000"/>
+            <a:ext cx="7315200" cy="274320"/>
+          </a:xfrm>
+          <a:prstGeom prst="rect">
+            <a:avLst/>
+          </a:prstGeom>
+          <a:noFill/>
+          <a:ln/>
+        </p:spPr>
+        <p:txBody>
+          <a:bodyPr wrap="square" lIns="0" tIns="0" rIns="0" bIns="0" rtlCol="0" anchor="ctr"/>
+          <a:lstStyle/>
+          <a:p>
+            <a:r>
+              <a:rPr lang="en-US" sz="1600" b="1" dirty="0">
+                <a:solidFill>
+                  <a:srgbClr val="CF3338"/>
+                </a:solidFill>
+                <a:latin typeface="Arial Black" pitchFamily="34" charset="0"/>
+                <a:ea typeface="Arial Black" pitchFamily="34" charset="-122"/>
+                <a:cs typeface="Arial Black" pitchFamily="34" charset="-120"/>
+              </a:rPr>
+              <a:t>Download files: </a:t>
+            </a:r>
+            <a:r>
+              <a:rPr lang="en-US" sz="1600" dirty="0">
+                <a:solidFill>
+                  <a:schemeClr val="tx1">
+                    <a:lumMod val="95000"/>
+                    <a:lumOff val="5000"/>
+                  </a:schemeClr>
+                </a:solidFill>
+                <a:latin typeface="Arial" pitchFamily="34" charset="0"/>
+                <a:ea typeface="Arial" pitchFamily="34" charset="-122"/>
+                <a:cs typeface="Arial" pitchFamily="34" charset="-120"/>
+                <a:hlinkClick r:id="rId3">
+                  <a:extLst>
+                    <a:ext uri="{A12FA001-AC4F-418D-AE19-62706E023703}">
+                      <ahyp:hlinkClr xmlns:ahyp="http://schemas.microsoft.com/office/drawing/2018/hyperlinkcolor" val="tx"/>
+                    </a:ext>
+                  </a:extLst>
+                </a:hlinkClick>
+              </a:rPr>
+              <a:t>https://swiy.co/Meonske26</a:t>
+            </a:r>
+            <a:r>
+              <a:rPr lang="en-US" sz="1600" dirty="0">
+                <a:solidFill>
+                  <a:schemeClr val="tx1">
+                    <a:lumMod val="95000"/>
+                    <a:lumOff val="5000"/>
+                  </a:schemeClr>
+                </a:solidFill>
+                <a:latin typeface="Arial" pitchFamily="34" charset="0"/>
+                <a:ea typeface="Arial" pitchFamily="34" charset="-122"/>
+                <a:cs typeface="Arial" pitchFamily="34" charset="-120"/>
+              </a:rPr>
+              <a:t> </a:t>
+            </a:r>
           </a:p>
         </p:txBody>
       </p:sp>
@@ -6112,6 +6169,7 @@
         <a:solidFill>
           <a:srgbClr val="EEECE1"/>
         </a:solidFill>
+        <a:effectLst/>
       </p:bgPr>
     </p:bg>
     <p:spTree>
@@ -6147,6 +6205,13 @@
           </a:solidFill>
           <a:ln/>
         </p:spPr>
+        <p:txBody>
+          <a:bodyPr/>
+          <a:lstStyle/>
+          <a:p>
+            <a:endParaRPr lang="en-US"/>
+          </a:p>
+        </p:txBody>
       </p:sp>
       <p:sp>
         <p:nvSpPr>
@@ -6169,7 +6234,7 @@
           <a:bodyPr wrap="square" lIns="0" tIns="0" rIns="0" bIns="0" rtlCol="0" anchor="ctr"/>
           <a:lstStyle/>
           <a:p>
-            <a:pPr indent="0" marL="0">
+            <a:pPr marL="0" indent="0">
               <a:buNone/>
             </a:pPr>
             <a:r>
@@ -6183,9 +6248,6 @@
               </a:rPr>
               <a:t>“Should we?”</a:t>
             </a:r>
-            <a:pPr indent="0" marL="0">
-              <a:buNone/>
-            </a:pPr>
             <a:r>
               <a:rPr lang="en-US" sz="1800" dirty="0">
                 <a:solidFill>
@@ -6197,9 +6259,6 @@
               </a:rPr>
               <a:t>  before  </a:t>
             </a:r>
-            <a:pPr indent="0" marL="0">
-              <a:buNone/>
-            </a:pPr>
             <a:r>
               <a:rPr lang="en-US" sz="3000" b="1" dirty="0">
                 <a:solidFill>
@@ -6236,7 +6295,7 @@
           <a:bodyPr wrap="square" lIns="0" tIns="0" rIns="0" bIns="0" rtlCol="0" anchor="ctr"/>
           <a:lstStyle/>
           <a:p>
-            <a:pPr indent="0" marL="0">
+            <a:pPr marL="0" indent="0">
               <a:buNone/>
             </a:pPr>
             <a:r>
@@ -6273,6 +6332,13 @@
           </a:solidFill>
           <a:ln/>
         </p:spPr>
+        <p:txBody>
+          <a:bodyPr/>
+          <a:lstStyle/>
+          <a:p>
+            <a:endParaRPr lang="en-US"/>
+          </a:p>
+        </p:txBody>
       </p:sp>
       <p:sp>
         <p:nvSpPr>
@@ -6293,6 +6359,13 @@
           </a:solidFill>
           <a:ln/>
         </p:spPr>
+        <p:txBody>
+          <a:bodyPr/>
+          <a:lstStyle/>
+          <a:p>
+            <a:endParaRPr lang="en-US"/>
+          </a:p>
+        </p:txBody>
       </p:sp>
       <p:sp>
         <p:nvSpPr>
@@ -6315,7 +6388,7 @@
           <a:bodyPr wrap="square" lIns="0" tIns="0" rIns="0" bIns="0" rtlCol="0" anchor="ctr"/>
           <a:lstStyle/>
           <a:p>
-            <a:pPr algn="ctr" indent="0" marL="0">
+            <a:pPr marL="0" indent="0" algn="ctr">
               <a:buNone/>
             </a:pPr>
             <a:r>
@@ -6354,7 +6427,7 @@
           <a:bodyPr wrap="square" lIns="0" tIns="0" rIns="0" bIns="0" rtlCol="0" anchor="ctr"/>
           <a:lstStyle/>
           <a:p>
-            <a:pPr indent="0" marL="0">
+            <a:pPr marL="0" indent="0">
               <a:buNone/>
             </a:pPr>
             <a:r>
@@ -6393,7 +6466,7 @@
           <a:bodyPr wrap="square" lIns="0" tIns="0" rIns="0" bIns="0" rtlCol="0" anchor="ctr"/>
           <a:lstStyle/>
           <a:p>
-            <a:pPr indent="0" marL="0">
+            <a:pPr marL="0" indent="0">
               <a:buNone/>
             </a:pPr>
             <a:r>
@@ -6430,6 +6503,13 @@
           </a:solidFill>
           <a:ln/>
         </p:spPr>
+        <p:txBody>
+          <a:bodyPr/>
+          <a:lstStyle/>
+          <a:p>
+            <a:endParaRPr lang="en-US"/>
+          </a:p>
+        </p:txBody>
       </p:sp>
       <p:sp>
         <p:nvSpPr>
@@ -6450,6 +6530,13 @@
           </a:solidFill>
           <a:ln/>
         </p:spPr>
+        <p:txBody>
+          <a:bodyPr/>
+          <a:lstStyle/>
+          <a:p>
+            <a:endParaRPr lang="en-US"/>
+          </a:p>
+        </p:txBody>
       </p:sp>
       <p:sp>
         <p:nvSpPr>
@@ -6472,7 +6559,7 @@
           <a:bodyPr wrap="square" lIns="0" tIns="0" rIns="0" bIns="0" rtlCol="0" anchor="ctr"/>
           <a:lstStyle/>
           <a:p>
-            <a:pPr algn="ctr" indent="0" marL="0">
+            <a:pPr marL="0" indent="0" algn="ctr">
               <a:buNone/>
             </a:pPr>
             <a:r>
@@ -6511,7 +6598,7 @@
           <a:bodyPr wrap="square" lIns="0" tIns="0" rIns="0" bIns="0" rtlCol="0" anchor="ctr"/>
           <a:lstStyle/>
           <a:p>
-            <a:pPr indent="0" marL="0">
+            <a:pPr marL="0" indent="0">
               <a:buNone/>
             </a:pPr>
             <a:r>
@@ -6550,7 +6637,7 @@
           <a:bodyPr wrap="square" lIns="0" tIns="0" rIns="0" bIns="0" rtlCol="0" anchor="ctr"/>
           <a:lstStyle/>
           <a:p>
-            <a:pPr indent="0" marL="0">
+            <a:pPr marL="0" indent="0">
               <a:buNone/>
             </a:pPr>
             <a:r>
@@ -6587,6 +6674,13 @@
           </a:solidFill>
           <a:ln/>
         </p:spPr>
+        <p:txBody>
+          <a:bodyPr/>
+          <a:lstStyle/>
+          <a:p>
+            <a:endParaRPr lang="en-US"/>
+          </a:p>
+        </p:txBody>
       </p:sp>
       <p:sp>
         <p:nvSpPr>
@@ -6607,6 +6701,13 @@
           </a:solidFill>
           <a:ln/>
         </p:spPr>
+        <p:txBody>
+          <a:bodyPr/>
+          <a:lstStyle/>
+          <a:p>
+            <a:endParaRPr lang="en-US"/>
+          </a:p>
+        </p:txBody>
       </p:sp>
       <p:sp>
         <p:nvSpPr>
@@ -6629,7 +6730,7 @@
           <a:bodyPr wrap="square" lIns="0" tIns="0" rIns="0" bIns="0" rtlCol="0" anchor="ctr"/>
           <a:lstStyle/>
           <a:p>
-            <a:pPr algn="ctr" indent="0" marL="0">
+            <a:pPr marL="0" indent="0" algn="ctr">
               <a:buNone/>
             </a:pPr>
             <a:r>
@@ -6668,7 +6769,7 @@
           <a:bodyPr wrap="square" lIns="0" tIns="0" rIns="0" bIns="0" rtlCol="0" anchor="ctr"/>
           <a:lstStyle/>
           <a:p>
-            <a:pPr indent="0" marL="0">
+            <a:pPr marL="0" indent="0">
               <a:buNone/>
             </a:pPr>
             <a:r>
@@ -6707,7 +6808,7 @@
           <a:bodyPr wrap="square" lIns="0" tIns="0" rIns="0" bIns="0" rtlCol="0" anchor="ctr"/>
           <a:lstStyle/>
           <a:p>
-            <a:pPr indent="0" marL="0">
+            <a:pPr marL="0" indent="0">
               <a:buNone/>
             </a:pPr>
             <a:r>
@@ -6744,6 +6845,13 @@
           </a:solidFill>
           <a:ln/>
         </p:spPr>
+        <p:txBody>
+          <a:bodyPr/>
+          <a:lstStyle/>
+          <a:p>
+            <a:endParaRPr lang="en-US"/>
+          </a:p>
+        </p:txBody>
       </p:sp>
       <p:sp>
         <p:nvSpPr>
@@ -6764,6 +6872,13 @@
           </a:solidFill>
           <a:ln/>
         </p:spPr>
+        <p:txBody>
+          <a:bodyPr/>
+          <a:lstStyle/>
+          <a:p>
+            <a:endParaRPr lang="en-US"/>
+          </a:p>
+        </p:txBody>
       </p:sp>
       <p:sp>
         <p:nvSpPr>
@@ -6786,7 +6901,7 @@
           <a:bodyPr wrap="square" lIns="0" tIns="0" rIns="0" bIns="0" rtlCol="0" anchor="ctr"/>
           <a:lstStyle/>
           <a:p>
-            <a:pPr algn="ctr" indent="0" marL="0">
+            <a:pPr marL="0" indent="0" algn="ctr">
               <a:buNone/>
             </a:pPr>
             <a:r>
@@ -6825,7 +6940,7 @@
           <a:bodyPr wrap="square" lIns="0" tIns="0" rIns="0" bIns="0" rtlCol="0" anchor="ctr"/>
           <a:lstStyle/>
           <a:p>
-            <a:pPr indent="0" marL="0">
+            <a:pPr marL="0" indent="0">
               <a:buNone/>
             </a:pPr>
             <a:r>
@@ -6864,7 +6979,7 @@
           <a:bodyPr wrap="square" lIns="0" tIns="0" rIns="0" bIns="0" rtlCol="0" anchor="ctr"/>
           <a:lstStyle/>
           <a:p>
-            <a:pPr indent="0" marL="0">
+            <a:pPr marL="0" indent="0">
               <a:buNone/>
             </a:pPr>
             <a:r>
@@ -6903,7 +7018,7 @@
           <a:bodyPr wrap="square" lIns="0" tIns="0" rIns="0" bIns="0" rtlCol="0" anchor="ctr"/>
           <a:lstStyle/>
           <a:p>
-            <a:pPr algn="r" indent="0" marL="0">
+            <a:pPr marL="0" indent="0" algn="r">
               <a:buNone/>
             </a:pPr>
             <a:r>
@@ -6930,13 +7045,14 @@
 </file>
 
 <file path=ppt/slides/slide5.xml><?xml version="1.0" encoding="utf-8"?>
-<p:sld xmlns:a="http://schemas.openxmlformats.org/drawingml/2006/main" xmlns:r="http://schemas.openxmlformats.org/officeDocument/2006/relationships" xmlns:p="http://schemas.openxmlformats.org/presentationml/2006/main">
+<p:sld xmlns:a="http://schemas.openxmlformats.org/drawingml/2006/main" xmlns:r="http://schemas.openxmlformats.org/officeDocument/2006/relationships" xmlns:p="http://schemas.openxmlformats.org/presentationml/2006/main" show="0">
   <p:cSld name="Slide 5">
     <p:bg>
       <p:bgPr>
         <a:solidFill>
           <a:srgbClr val="EEECE1"/>
         </a:solidFill>
+        <a:effectLst/>
       </p:bgPr>
     </p:bg>
     <p:spTree>
@@ -6972,6 +7088,13 @@
           </a:solidFill>
           <a:ln/>
         </p:spPr>
+        <p:txBody>
+          <a:bodyPr/>
+          <a:lstStyle/>
+          <a:p>
+            <a:endParaRPr lang="en-US"/>
+          </a:p>
+        </p:txBody>
       </p:sp>
       <p:sp>
         <p:nvSpPr>
@@ -6994,7 +7117,7 @@
           <a:bodyPr wrap="square" lIns="0" tIns="0" rIns="0" bIns="0" rtlCol="0" anchor="ctr"/>
           <a:lstStyle/>
           <a:p>
-            <a:pPr indent="0" marL="0">
+            <a:pPr marL="0" indent="0">
               <a:buNone/>
             </a:pPr>
             <a:r>
@@ -7033,7 +7156,7 @@
           <a:bodyPr wrap="square" lIns="0" tIns="0" rIns="0" bIns="0" rtlCol="0" anchor="ctr"/>
           <a:lstStyle/>
           <a:p>
-            <a:pPr indent="0" marL="0">
+            <a:pPr marL="0" indent="0">
               <a:buNone/>
             </a:pPr>
             <a:r>
@@ -7072,7 +7195,7 @@
           <a:bodyPr wrap="square" lIns="0" tIns="0" rIns="0" bIns="0" rtlCol="0" anchor="t"/>
           <a:lstStyle/>
           <a:p>
-            <a:pPr algn="ctr" indent="0" marL="0">
+            <a:pPr marL="0" indent="0" algn="ctr">
               <a:buNone/>
             </a:pPr>
             <a:r>
@@ -7111,7 +7234,7 @@
           <a:bodyPr wrap="square" lIns="0" tIns="0" rIns="0" bIns="0" rtlCol="0" anchor="b"/>
           <a:lstStyle/>
           <a:p>
-            <a:pPr algn="ctr" indent="0" marL="0">
+            <a:pPr marL="0" indent="0" algn="ctr">
               <a:buNone/>
             </a:pPr>
             <a:r>
@@ -7150,7 +7273,7 @@
           <a:bodyPr wrap="square" lIns="0" tIns="0" rIns="0" bIns="0" rtlCol="0" anchor="ctr"/>
           <a:lstStyle/>
           <a:p>
-            <a:pPr algn="ctr" indent="0" marL="0">
+            <a:pPr marL="0" indent="0" algn="ctr">
               <a:buNone/>
             </a:pPr>
             <a:r>
@@ -7187,6 +7310,13 @@
           </a:solidFill>
           <a:ln/>
         </p:spPr>
+        <p:txBody>
+          <a:bodyPr/>
+          <a:lstStyle/>
+          <a:p>
+            <a:endParaRPr lang="en-US"/>
+          </a:p>
+        </p:txBody>
       </p:sp>
       <p:sp>
         <p:nvSpPr>
@@ -7209,7 +7339,7 @@
           <a:bodyPr wrap="square" lIns="0" tIns="0" rIns="0" bIns="0" rtlCol="0" anchor="ctr"/>
           <a:lstStyle/>
           <a:p>
-            <a:pPr indent="0" marL="0">
+            <a:pPr marL="0" indent="0">
               <a:buNone/>
             </a:pPr>
             <a:r>
@@ -7248,7 +7378,7 @@
           <a:bodyPr wrap="square" lIns="0" tIns="0" rIns="0" bIns="0" rtlCol="0" anchor="ctr"/>
           <a:lstStyle/>
           <a:p>
-            <a:pPr indent="0" marL="0">
+            <a:pPr marL="0" indent="0">
               <a:buNone/>
             </a:pPr>
             <a:r>
@@ -7287,7 +7417,7 @@
           <a:bodyPr wrap="square" lIns="0" tIns="0" rIns="0" bIns="0" rtlCol="0" anchor="ctr"/>
           <a:lstStyle/>
           <a:p>
-            <a:pPr indent="0" marL="0">
+            <a:pPr marL="0" indent="0">
               <a:buNone/>
             </a:pPr>
             <a:r>
@@ -7324,6 +7454,13 @@
           </a:solidFill>
           <a:ln/>
         </p:spPr>
+        <p:txBody>
+          <a:bodyPr/>
+          <a:lstStyle/>
+          <a:p>
+            <a:endParaRPr lang="en-US"/>
+          </a:p>
+        </p:txBody>
       </p:sp>
       <p:sp>
         <p:nvSpPr>
@@ -7346,7 +7483,7 @@
           <a:bodyPr wrap="square" lIns="0" tIns="0" rIns="0" bIns="0" rtlCol="0" anchor="ctr"/>
           <a:lstStyle/>
           <a:p>
-            <a:pPr indent="0" marL="0">
+            <a:pPr marL="0" indent="0">
               <a:buNone/>
             </a:pPr>
             <a:r>
@@ -7385,7 +7522,7 @@
           <a:bodyPr wrap="square" lIns="0" tIns="0" rIns="0" bIns="0" rtlCol="0" anchor="ctr"/>
           <a:lstStyle/>
           <a:p>
-            <a:pPr indent="0" marL="0">
+            <a:pPr marL="0" indent="0">
               <a:buNone/>
             </a:pPr>
             <a:r>
@@ -7424,7 +7561,7 @@
           <a:bodyPr wrap="square" lIns="0" tIns="0" rIns="0" bIns="0" rtlCol="0" anchor="ctr"/>
           <a:lstStyle/>
           <a:p>
-            <a:pPr indent="0" marL="0">
+            <a:pPr marL="0" indent="0">
               <a:buNone/>
             </a:pPr>
             <a:r>
@@ -7461,6 +7598,13 @@
           </a:solidFill>
           <a:ln/>
         </p:spPr>
+        <p:txBody>
+          <a:bodyPr/>
+          <a:lstStyle/>
+          <a:p>
+            <a:endParaRPr lang="en-US"/>
+          </a:p>
+        </p:txBody>
       </p:sp>
       <p:sp>
         <p:nvSpPr>
@@ -7483,7 +7627,7 @@
           <a:bodyPr wrap="square" lIns="0" tIns="0" rIns="0" bIns="0" rtlCol="0" anchor="ctr"/>
           <a:lstStyle/>
           <a:p>
-            <a:pPr indent="0" marL="0">
+            <a:pPr marL="0" indent="0">
               <a:buNone/>
             </a:pPr>
             <a:r>
@@ -7522,7 +7666,7 @@
           <a:bodyPr wrap="square" lIns="0" tIns="0" rIns="0" bIns="0" rtlCol="0" anchor="ctr"/>
           <a:lstStyle/>
           <a:p>
-            <a:pPr indent="0" marL="0">
+            <a:pPr marL="0" indent="0">
               <a:buNone/>
             </a:pPr>
             <a:r>
@@ -7561,7 +7705,7 @@
           <a:bodyPr wrap="square" lIns="0" tIns="0" rIns="0" bIns="0" rtlCol="0" anchor="ctr"/>
           <a:lstStyle/>
           <a:p>
-            <a:pPr indent="0" marL="0">
+            <a:pPr marL="0" indent="0">
               <a:buNone/>
             </a:pPr>
             <a:r>
@@ -7598,6 +7742,13 @@
           </a:solidFill>
           <a:ln/>
         </p:spPr>
+        <p:txBody>
+          <a:bodyPr/>
+          <a:lstStyle/>
+          <a:p>
+            <a:endParaRPr lang="en-US"/>
+          </a:p>
+        </p:txBody>
       </p:sp>
       <p:sp>
         <p:nvSpPr>
@@ -7620,7 +7771,7 @@
           <a:bodyPr wrap="square" lIns="0" tIns="0" rIns="0" bIns="0" rtlCol="0" anchor="ctr"/>
           <a:lstStyle/>
           <a:p>
-            <a:pPr indent="0" marL="0">
+            <a:pPr marL="0" indent="0">
               <a:buNone/>
             </a:pPr>
             <a:r>
@@ -7659,7 +7810,7 @@
           <a:bodyPr wrap="square" lIns="0" tIns="0" rIns="0" bIns="0" rtlCol="0" anchor="ctr"/>
           <a:lstStyle/>
           <a:p>
-            <a:pPr indent="0" marL="0">
+            <a:pPr marL="0" indent="0">
               <a:buNone/>
             </a:pPr>
             <a:r>
@@ -7698,7 +7849,7 @@
           <a:bodyPr wrap="square" lIns="0" tIns="0" rIns="0" bIns="0" rtlCol="0" anchor="ctr"/>
           <a:lstStyle/>
           <a:p>
-            <a:pPr indent="0" marL="0">
+            <a:pPr marL="0" indent="0">
               <a:buNone/>
             </a:pPr>
             <a:r>
@@ -7732,6 +7883,7 @@
         <a:solidFill>
           <a:srgbClr val="EEECE1"/>
         </a:solidFill>
+        <a:effectLst/>
       </p:bgPr>
     </p:bg>
     <p:spTree>
@@ -7767,6 +7919,13 @@
           </a:solidFill>
           <a:ln/>
         </p:spPr>
+        <p:txBody>
+          <a:bodyPr/>
+          <a:lstStyle/>
+          <a:p>
+            <a:endParaRPr lang="en-US"/>
+          </a:p>
+        </p:txBody>
       </p:sp>
       <p:sp>
         <p:nvSpPr>
@@ -7789,7 +7948,7 @@
           <a:bodyPr wrap="square" lIns="0" tIns="0" rIns="0" bIns="0" rtlCol="0" anchor="ctr"/>
           <a:lstStyle/>
           <a:p>
-            <a:pPr indent="0" marL="0">
+            <a:pPr marL="0" indent="0">
               <a:buNone/>
             </a:pPr>
             <a:r>
@@ -7828,7 +7987,7 @@
           <a:bodyPr wrap="square" lIns="0" tIns="0" rIns="0" bIns="0" rtlCol="0" anchor="ctr"/>
           <a:lstStyle/>
           <a:p>
-            <a:pPr indent="0" marL="0">
+            <a:pPr marL="0" indent="0">
               <a:buNone/>
             </a:pPr>
             <a:r>
@@ -7865,6 +8024,13 @@
           </a:solidFill>
           <a:ln/>
         </p:spPr>
+        <p:txBody>
+          <a:bodyPr/>
+          <a:lstStyle/>
+          <a:p>
+            <a:endParaRPr lang="en-US"/>
+          </a:p>
+        </p:txBody>
       </p:sp>
       <p:sp>
         <p:nvSpPr>
@@ -7887,7 +8053,7 @@
           <a:bodyPr wrap="square" lIns="0" tIns="0" rIns="0" bIns="0" rtlCol="0" anchor="ctr"/>
           <a:lstStyle/>
           <a:p>
-            <a:pPr indent="0" marL="0">
+            <a:pPr marL="0" indent="0">
               <a:buNone/>
             </a:pPr>
             <a:r>
@@ -7926,7 +8092,7 @@
           <a:bodyPr wrap="square" lIns="0" tIns="0" rIns="0" bIns="0" rtlCol="0" anchor="t"/>
           <a:lstStyle/>
           <a:p>
-            <a:pPr indent="0" marL="0">
+            <a:pPr marL="0" indent="0">
               <a:buNone/>
             </a:pPr>
             <a:r>
@@ -7937,9 +8103,6 @@
               </a:rPr>
               <a:t>•  </a:t>
             </a:r>
-            <a:pPr indent="0" marL="0">
-              <a:buNone/>
-            </a:pPr>
             <a:r>
               <a:rPr lang="en-US" sz="1200" dirty="0">
                 <a:solidFill>
@@ -7976,7 +8139,7 @@
           <a:bodyPr wrap="square" lIns="0" tIns="0" rIns="0" bIns="0" rtlCol="0" anchor="t"/>
           <a:lstStyle/>
           <a:p>
-            <a:pPr indent="0" marL="0">
+            <a:pPr marL="0" indent="0">
               <a:buNone/>
             </a:pPr>
             <a:r>
@@ -7987,9 +8150,6 @@
               </a:rPr>
               <a:t>•  </a:t>
             </a:r>
-            <a:pPr indent="0" marL="0">
-              <a:buNone/>
-            </a:pPr>
             <a:r>
               <a:rPr lang="en-US" sz="1200" dirty="0">
                 <a:solidFill>
@@ -8026,7 +8186,7 @@
           <a:bodyPr wrap="square" lIns="0" tIns="0" rIns="0" bIns="0" rtlCol="0" anchor="t"/>
           <a:lstStyle/>
           <a:p>
-            <a:pPr indent="0" marL="0">
+            <a:pPr marL="0" indent="0">
               <a:buNone/>
             </a:pPr>
             <a:r>
@@ -8037,9 +8197,6 @@
               </a:rPr>
               <a:t>•  </a:t>
             </a:r>
-            <a:pPr indent="0" marL="0">
-              <a:buNone/>
-            </a:pPr>
             <a:r>
               <a:rPr lang="en-US" sz="1200" dirty="0">
                 <a:solidFill>
@@ -8076,7 +8233,7 @@
           <a:bodyPr wrap="square" lIns="0" tIns="0" rIns="0" bIns="0" rtlCol="0" anchor="t"/>
           <a:lstStyle/>
           <a:p>
-            <a:pPr indent="0" marL="0">
+            <a:pPr marL="0" indent="0">
               <a:buNone/>
             </a:pPr>
             <a:r>
@@ -8087,9 +8244,6 @@
               </a:rPr>
               <a:t>•  </a:t>
             </a:r>
-            <a:pPr indent="0" marL="0">
-              <a:buNone/>
-            </a:pPr>
             <a:r>
               <a:rPr lang="en-US" sz="1200" dirty="0">
                 <a:solidFill>
@@ -8124,6 +8278,13 @@
           </a:solidFill>
           <a:ln/>
         </p:spPr>
+        <p:txBody>
+          <a:bodyPr/>
+          <a:lstStyle/>
+          <a:p>
+            <a:endParaRPr lang="en-US"/>
+          </a:p>
+        </p:txBody>
       </p:sp>
       <p:sp>
         <p:nvSpPr>
@@ -8146,7 +8307,7 @@
           <a:bodyPr wrap="square" lIns="0" tIns="0" rIns="0" bIns="0" rtlCol="0" anchor="ctr"/>
           <a:lstStyle/>
           <a:p>
-            <a:pPr indent="0" marL="0">
+            <a:pPr marL="0" indent="0">
               <a:buNone/>
             </a:pPr>
             <a:r>
@@ -8185,7 +8346,7 @@
           <a:bodyPr wrap="square" lIns="0" tIns="0" rIns="0" bIns="0" rtlCol="0" anchor="t"/>
           <a:lstStyle/>
           <a:p>
-            <a:pPr indent="0" marL="0">
+            <a:pPr marL="0" indent="0">
               <a:buNone/>
             </a:pPr>
             <a:r>
@@ -8196,9 +8357,6 @@
               </a:rPr>
               <a:t>•  </a:t>
             </a:r>
-            <a:pPr indent="0" marL="0">
-              <a:buNone/>
-            </a:pPr>
             <a:r>
               <a:rPr lang="en-US" sz="1200" dirty="0">
                 <a:solidFill>
@@ -8235,7 +8393,7 @@
           <a:bodyPr wrap="square" lIns="0" tIns="0" rIns="0" bIns="0" rtlCol="0" anchor="t"/>
           <a:lstStyle/>
           <a:p>
-            <a:pPr indent="0" marL="0">
+            <a:pPr marL="0" indent="0">
               <a:buNone/>
             </a:pPr>
             <a:r>
@@ -8246,9 +8404,6 @@
               </a:rPr>
               <a:t>•  </a:t>
             </a:r>
-            <a:pPr indent="0" marL="0">
-              <a:buNone/>
-            </a:pPr>
             <a:r>
               <a:rPr lang="en-US" sz="1200" dirty="0">
                 <a:solidFill>
@@ -8285,7 +8440,7 @@
           <a:bodyPr wrap="square" lIns="0" tIns="0" rIns="0" bIns="0" rtlCol="0" anchor="t"/>
           <a:lstStyle/>
           <a:p>
-            <a:pPr indent="0" marL="0">
+            <a:pPr marL="0" indent="0">
               <a:buNone/>
             </a:pPr>
             <a:r>
@@ -8296,9 +8451,6 @@
               </a:rPr>
               <a:t>•  </a:t>
             </a:r>
-            <a:pPr indent="0" marL="0">
-              <a:buNone/>
-            </a:pPr>
             <a:r>
               <a:rPr lang="en-US" sz="1200" dirty="0">
                 <a:solidFill>
@@ -8335,7 +8487,7 @@
           <a:bodyPr wrap="square" lIns="0" tIns="0" rIns="0" bIns="0" rtlCol="0" anchor="t"/>
           <a:lstStyle/>
           <a:p>
-            <a:pPr indent="0" marL="0">
+            <a:pPr marL="0" indent="0">
               <a:buNone/>
             </a:pPr>
             <a:r>
@@ -8346,9 +8498,6 @@
               </a:rPr>
               <a:t>•  </a:t>
             </a:r>
-            <a:pPr indent="0" marL="0">
-              <a:buNone/>
-            </a:pPr>
             <a:r>
               <a:rPr lang="en-US" sz="1200" dirty="0">
                 <a:solidFill>
@@ -8358,7 +8507,7 @@
                 <a:ea typeface="Arial" pitchFamily="34" charset="-122"/>
                 <a:cs typeface="Arial" pitchFamily="34" charset="-120"/>
               </a:rPr>
-              <a:t>Not a new risk — an evolution of risk you already manage</a:t>
+              <a:t>Not a new risk…  an evolution of risk you already manage</a:t>
             </a:r>
             <a:endParaRPr lang="en-US" sz="1200" dirty="0"/>
           </a:p>
@@ -8380,6 +8529,7 @@
         <a:solidFill>
           <a:srgbClr val="EEECE1"/>
         </a:solidFill>
+        <a:effectLst/>
       </p:bgPr>
     </p:bg>
     <p:spTree>
@@ -8415,6 +8565,13 @@
           </a:solidFill>
           <a:ln/>
         </p:spPr>
+        <p:txBody>
+          <a:bodyPr/>
+          <a:lstStyle/>
+          <a:p>
+            <a:endParaRPr lang="en-US"/>
+          </a:p>
+        </p:txBody>
       </p:sp>
       <p:sp>
         <p:nvSpPr>
@@ -8437,7 +8594,7 @@
           <a:bodyPr wrap="square" lIns="0" tIns="0" rIns="0" bIns="0" rtlCol="0" anchor="ctr"/>
           <a:lstStyle/>
           <a:p>
-            <a:pPr indent="0" marL="0">
+            <a:pPr marL="0" indent="0">
               <a:buNone/>
             </a:pPr>
             <a:r>
@@ -8476,7 +8633,7 @@
           <a:bodyPr wrap="square" lIns="0" tIns="0" rIns="0" bIns="0" rtlCol="0" anchor="ctr"/>
           <a:lstStyle/>
           <a:p>
-            <a:pPr indent="0" marL="0">
+            <a:pPr marL="0" indent="0">
               <a:buNone/>
             </a:pPr>
             <a:r>
@@ -8513,6 +8670,13 @@
           </a:solidFill>
           <a:ln/>
         </p:spPr>
+        <p:txBody>
+          <a:bodyPr/>
+          <a:lstStyle/>
+          <a:p>
+            <a:endParaRPr lang="en-US"/>
+          </a:p>
+        </p:txBody>
       </p:sp>
       <p:sp>
         <p:nvSpPr>
@@ -8533,6 +8697,13 @@
           </a:solidFill>
           <a:ln/>
         </p:spPr>
+        <p:txBody>
+          <a:bodyPr/>
+          <a:lstStyle/>
+          <a:p>
+            <a:endParaRPr lang="en-US"/>
+          </a:p>
+        </p:txBody>
       </p:sp>
       <p:sp>
         <p:nvSpPr>
@@ -8555,7 +8726,7 @@
           <a:bodyPr wrap="square" lIns="0" tIns="0" rIns="0" bIns="0" rtlCol="0" anchor="ctr"/>
           <a:lstStyle/>
           <a:p>
-            <a:pPr indent="0" marL="0">
+            <a:pPr marL="0" indent="0">
               <a:buNone/>
             </a:pPr>
             <a:r>
@@ -8594,7 +8765,7 @@
           <a:bodyPr wrap="square" lIns="0" tIns="0" rIns="0" bIns="0" rtlCol="0" anchor="ctr"/>
           <a:lstStyle/>
           <a:p>
-            <a:pPr indent="0" marL="0">
+            <a:pPr marL="0" indent="0">
               <a:buNone/>
             </a:pPr>
             <a:r>
@@ -8606,7 +8777,7 @@
                 <a:ea typeface="Arial" pitchFamily="34" charset="-122"/>
                 <a:cs typeface="Arial" pitchFamily="34" charset="-120"/>
               </a:rPr>
-              <a:t>Lives inside Excel. Respects your tenant boundary. Best starting point for most of you — it’s the Microsoft tool.</a:t>
+              <a:t>Lives inside Excel. Respects your tenant boundary. Best starting point for most of you; it’s the Microsoft tool.</a:t>
             </a:r>
             <a:endParaRPr lang="en-US" sz="1300" dirty="0"/>
           </a:p>
@@ -8633,7 +8804,7 @@
           <a:bodyPr wrap="square" lIns="0" tIns="0" rIns="0" bIns="0" rtlCol="0" anchor="ctr"/>
           <a:lstStyle/>
           <a:p>
-            <a:pPr indent="0" marL="0">
+            <a:pPr marL="0" indent="0">
               <a:buNone/>
             </a:pPr>
             <a:r>
@@ -8675,6 +8846,13 @@
             <a:prstDash val="solid"/>
           </a:ln>
         </p:spPr>
+        <p:txBody>
+          <a:bodyPr/>
+          <a:lstStyle/>
+          <a:p>
+            <a:endParaRPr lang="en-US"/>
+          </a:p>
+        </p:txBody>
       </p:sp>
       <p:sp>
         <p:nvSpPr>
@@ -8695,6 +8873,13 @@
           </a:solidFill>
           <a:ln/>
         </p:spPr>
+        <p:txBody>
+          <a:bodyPr/>
+          <a:lstStyle/>
+          <a:p>
+            <a:endParaRPr lang="en-US"/>
+          </a:p>
+        </p:txBody>
       </p:sp>
       <p:sp>
         <p:nvSpPr>
@@ -8717,7 +8902,7 @@
           <a:bodyPr wrap="square" lIns="0" tIns="0" rIns="0" bIns="0" rtlCol="0" anchor="ctr"/>
           <a:lstStyle/>
           <a:p>
-            <a:pPr indent="0" marL="0">
+            <a:pPr marL="0" indent="0">
               <a:buNone/>
             </a:pPr>
             <a:r>
@@ -8756,7 +8941,7 @@
           <a:bodyPr wrap="square" lIns="0" tIns="0" rIns="0" bIns="0" rtlCol="0" anchor="ctr"/>
           <a:lstStyle/>
           <a:p>
-            <a:pPr indent="0" marL="0">
+            <a:pPr marL="0" indent="0">
               <a:buNone/>
             </a:pPr>
             <a:r>
@@ -8768,7 +8953,7 @@
                 <a:ea typeface="Arial" pitchFamily="34" charset="-122"/>
                 <a:cs typeface="Arial" pitchFamily="34" charset="-120"/>
               </a:rPr>
-              <a:t>Great for general questions and learning. Data goes to OpenAI’s servers — check your org’s policy first.</a:t>
+              <a:t>Great for general questions and learning. Data goes to OpenAI’s servers, check your org’s policy first.</a:t>
             </a:r>
             <a:endParaRPr lang="en-US" sz="1300" dirty="0"/>
           </a:p>
@@ -8798,6 +8983,13 @@
             <a:prstDash val="solid"/>
           </a:ln>
         </p:spPr>
+        <p:txBody>
+          <a:bodyPr/>
+          <a:lstStyle/>
+          <a:p>
+            <a:endParaRPr lang="en-US"/>
+          </a:p>
+        </p:txBody>
       </p:sp>
       <p:sp>
         <p:nvSpPr>
@@ -8818,6 +9010,13 @@
           </a:solidFill>
           <a:ln/>
         </p:spPr>
+        <p:txBody>
+          <a:bodyPr/>
+          <a:lstStyle/>
+          <a:p>
+            <a:endParaRPr lang="en-US"/>
+          </a:p>
+        </p:txBody>
       </p:sp>
       <p:sp>
         <p:nvSpPr>
@@ -8840,7 +9039,7 @@
           <a:bodyPr wrap="square" lIns="0" tIns="0" rIns="0" bIns="0" rtlCol="0" anchor="ctr"/>
           <a:lstStyle/>
           <a:p>
-            <a:pPr indent="0" marL="0">
+            <a:pPr marL="0" indent="0">
               <a:buNone/>
             </a:pPr>
             <a:r>
@@ -8879,7 +9078,7 @@
           <a:bodyPr wrap="square" lIns="0" tIns="0" rIns="0" bIns="0" rtlCol="0" anchor="ctr"/>
           <a:lstStyle/>
           <a:p>
-            <a:pPr indent="0" marL="0">
+            <a:pPr marL="0" indent="0">
               <a:buNone/>
             </a:pPr>
             <a:r>
@@ -8891,7 +9090,7 @@
                 <a:ea typeface="Arial" pitchFamily="34" charset="-122"/>
                 <a:cs typeface="Arial" pitchFamily="34" charset="-120"/>
               </a:rPr>
-              <a:t>Strong at reasoning and code. Claude can also work as an agent — reading files, writing docs, running code on your behalf.</a:t>
+              <a:t>Strong at reasoning and code. Claude can also work as an agent, reading files, writing docs, running code on your behalf.</a:t>
             </a:r>
             <a:endParaRPr lang="en-US" sz="1300" dirty="0"/>
           </a:p>
@@ -8916,6 +9115,13 @@
           </a:solidFill>
           <a:ln/>
         </p:spPr>
+        <p:txBody>
+          <a:bodyPr/>
+          <a:lstStyle/>
+          <a:p>
+            <a:endParaRPr lang="en-US"/>
+          </a:p>
+        </p:txBody>
       </p:sp>
       <p:sp>
         <p:nvSpPr>
@@ -8938,7 +9144,7 @@
           <a:bodyPr wrap="square" lIns="0" tIns="0" rIns="0" bIns="0" rtlCol="0" anchor="ctr"/>
           <a:lstStyle/>
           <a:p>
-            <a:pPr indent="0" marL="0">
+            <a:pPr marL="0" indent="0">
               <a:buNone/>
             </a:pPr>
             <a:r>
@@ -8952,9 +9158,6 @@
               </a:rPr>
               <a:t>What’s an agent?  </a:t>
             </a:r>
-            <a:pPr indent="0" marL="0">
-              <a:buNone/>
-            </a:pPr>
             <a:r>
               <a:rPr lang="en-US" sz="1200" dirty="0">
                 <a:solidFill>
@@ -8969,7 +9172,7 @@
             <a:endParaRPr lang="en-US" sz="1300" dirty="0"/>
           </a:p>
           <a:p>
-            <a:pPr indent="0" marL="0">
+            <a:pPr marL="0" indent="0">
               <a:buNone/>
             </a:pPr>
             <a:r>
@@ -8981,48 +9184,9 @@
                 <a:ea typeface="Arial" pitchFamily="34" charset="-122"/>
                 <a:cs typeface="Arial" pitchFamily="34" charset="-120"/>
               </a:rPr>
-              <a:t>Edit with Copilot is an early example: you give it a goal and it figures out the steps.</a:t>
+              <a:t>Edit with Copilot is a basic example: you give it a goal and it figures out the steps.</a:t>
             </a:r>
             <a:endParaRPr lang="en-US" sz="1300" dirty="0"/>
-          </a:p>
-        </p:txBody>
-      </p:sp>
-      <p:sp>
-        <p:nvSpPr>
-          <p:cNvPr id="20" name="Text 18"/>
-          <p:cNvSpPr/>
-          <p:nvPr/>
-        </p:nvSpPr>
-        <p:spPr>
-          <a:xfrm>
-            <a:off x="6583680" y="4754880"/>
-            <a:ext cx="2286000" cy="274320"/>
-          </a:xfrm>
-          <a:prstGeom prst="rect">
-            <a:avLst/>
-          </a:prstGeom>
-          <a:noFill/>
-          <a:ln/>
-        </p:spPr>
-        <p:txBody>
-          <a:bodyPr wrap="square" lIns="0" tIns="0" rIns="0" bIns="0" rtlCol="0" anchor="ctr"/>
-          <a:lstStyle/>
-          <a:p>
-            <a:pPr algn="r" indent="0" marL="0">
-              <a:buNone/>
-            </a:pPr>
-            <a:r>
-              <a:rPr lang="en-US" sz="900" dirty="0">
-                <a:solidFill>
-                  <a:srgbClr val="707070"/>
-                </a:solidFill>
-                <a:latin typeface="Arial Black" pitchFamily="34" charset="0"/>
-                <a:ea typeface="Arial Black" pitchFamily="34" charset="-122"/>
-                <a:cs typeface="Arial Black" pitchFamily="34" charset="-120"/>
-              </a:rPr>
-              <a:t>Stringfest Analytics</a:t>
-            </a:r>
-            <a:endParaRPr lang="en-US" sz="900" dirty="0"/>
           </a:p>
         </p:txBody>
       </p:sp>
@@ -9042,6 +9206,7 @@
         <a:solidFill>
           <a:srgbClr val="C00000"/>
         </a:solidFill>
+        <a:effectLst/>
       </p:bgPr>
     </p:bg>
     <p:spTree>
@@ -9079,7 +9244,7 @@
           <a:bodyPr wrap="square" lIns="0" tIns="0" rIns="0" bIns="0" rtlCol="0" anchor="ctr"/>
           <a:lstStyle/>
           <a:p>
-            <a:pPr algn="ctr" indent="0" marL="0">
+            <a:pPr marL="0" indent="0" algn="ctr">
               <a:buNone/>
             </a:pPr>
             <a:r>
@@ -9116,6 +9281,13 @@
           </a:solidFill>
           <a:ln/>
         </p:spPr>
+        <p:txBody>
+          <a:bodyPr/>
+          <a:lstStyle/>
+          <a:p>
+            <a:endParaRPr lang="en-US"/>
+          </a:p>
+        </p:txBody>
       </p:sp>
       <p:sp>
         <p:nvSpPr>
@@ -9138,7 +9310,7 @@
           <a:bodyPr wrap="square" lIns="0" tIns="0" rIns="0" bIns="0" rtlCol="0" anchor="ctr"/>
           <a:lstStyle/>
           <a:p>
-            <a:pPr algn="ctr" indent="0" marL="0">
+            <a:pPr marL="0" indent="0" algn="ctr">
               <a:buNone/>
             </a:pPr>
             <a:r>
@@ -9177,7 +9349,7 @@
           <a:bodyPr wrap="square" lIns="0" tIns="0" rIns="0" bIns="0" rtlCol="0" anchor="t"/>
           <a:lstStyle/>
           <a:p>
-            <a:pPr algn="ctr" indent="0" marL="0">
+            <a:pPr marL="0" indent="0" algn="ctr">
               <a:buNone/>
             </a:pPr>
             <a:r>
@@ -9214,6 +9386,13 @@
           </a:solidFill>
           <a:ln/>
         </p:spPr>
+        <p:txBody>
+          <a:bodyPr/>
+          <a:lstStyle/>
+          <a:p>
+            <a:endParaRPr lang="en-US"/>
+          </a:p>
+        </p:txBody>
       </p:sp>
       <p:sp>
         <p:nvSpPr>
@@ -9236,7 +9415,7 @@
           <a:bodyPr wrap="square" lIns="0" tIns="0" rIns="0" bIns="0" rtlCol="0" anchor="ctr"/>
           <a:lstStyle/>
           <a:p>
-            <a:pPr algn="ctr" indent="0" marL="0">
+            <a:pPr marL="0" indent="0" algn="ctr">
               <a:buNone/>
             </a:pPr>
             <a:r>
@@ -9275,7 +9454,7 @@
           <a:bodyPr wrap="square" lIns="0" tIns="0" rIns="0" bIns="0" rtlCol="0" anchor="t"/>
           <a:lstStyle/>
           <a:p>
-            <a:pPr algn="ctr" indent="0" marL="0">
+            <a:pPr marL="0" indent="0" algn="ctr">
               <a:buNone/>
             </a:pPr>
             <a:r>
@@ -9312,6 +9491,13 @@
           </a:solidFill>
           <a:ln/>
         </p:spPr>
+        <p:txBody>
+          <a:bodyPr/>
+          <a:lstStyle/>
+          <a:p>
+            <a:endParaRPr lang="en-US"/>
+          </a:p>
+        </p:txBody>
       </p:sp>
       <p:sp>
         <p:nvSpPr>
@@ -9334,7 +9520,7 @@
           <a:bodyPr wrap="square" lIns="0" tIns="0" rIns="0" bIns="0" rtlCol="0" anchor="ctr"/>
           <a:lstStyle/>
           <a:p>
-            <a:pPr algn="ctr" indent="0" marL="0">
+            <a:pPr marL="0" indent="0" algn="ctr">
               <a:buNone/>
             </a:pPr>
             <a:r>
@@ -9373,7 +9559,7 @@
           <a:bodyPr wrap="square" lIns="0" tIns="0" rIns="0" bIns="0" rtlCol="0" anchor="t"/>
           <a:lstStyle/>
           <a:p>
-            <a:pPr algn="ctr" indent="0" marL="0">
+            <a:pPr marL="0" indent="0" algn="ctr">
               <a:buNone/>
             </a:pPr>
             <a:r>
@@ -9412,7 +9598,7 @@
           <a:bodyPr wrap="square" lIns="0" tIns="0" rIns="0" bIns="0" rtlCol="0" anchor="ctr"/>
           <a:lstStyle/>
           <a:p>
-            <a:pPr algn="r" indent="0" marL="0">
+            <a:pPr marL="0" indent="0" algn="r">
               <a:buNone/>
             </a:pPr>
             <a:r>
@@ -9446,6 +9632,7 @@
         <a:solidFill>
           <a:srgbClr val="EEECE1"/>
         </a:solidFill>
+        <a:effectLst/>
       </p:bgPr>
     </p:bg>
     <p:spTree>
@@ -9481,6 +9668,13 @@
           </a:solidFill>
           <a:ln/>
         </p:spPr>
+        <p:txBody>
+          <a:bodyPr/>
+          <a:lstStyle/>
+          <a:p>
+            <a:endParaRPr lang="en-US"/>
+          </a:p>
+        </p:txBody>
       </p:sp>
       <p:sp>
         <p:nvSpPr>
@@ -9501,6 +9695,13 @@
           </a:solidFill>
           <a:ln/>
         </p:spPr>
+        <p:txBody>
+          <a:bodyPr/>
+          <a:lstStyle/>
+          <a:p>
+            <a:endParaRPr lang="en-US"/>
+          </a:p>
+        </p:txBody>
       </p:sp>
       <p:sp>
         <p:nvSpPr>
@@ -9521,6 +9722,13 @@
           </a:solidFill>
           <a:ln/>
         </p:spPr>
+        <p:txBody>
+          <a:bodyPr/>
+          <a:lstStyle/>
+          <a:p>
+            <a:endParaRPr lang="en-US"/>
+          </a:p>
+        </p:txBody>
       </p:sp>
       <p:sp>
         <p:nvSpPr>
@@ -9543,7 +9751,7 @@
           <a:bodyPr wrap="square" lIns="0" tIns="0" rIns="0" bIns="0" rtlCol="0" anchor="ctr"/>
           <a:lstStyle/>
           <a:p>
-            <a:pPr algn="ctr" indent="0" marL="0">
+            <a:pPr marL="0" indent="0" algn="ctr">
               <a:buNone/>
             </a:pPr>
             <a:r>
@@ -9582,7 +9790,7 @@
           <a:bodyPr wrap="square" lIns="0" tIns="0" rIns="0" bIns="0" rtlCol="0" anchor="ctr"/>
           <a:lstStyle/>
           <a:p>
-            <a:pPr indent="0" marL="0">
+            <a:pPr marL="0" indent="0">
               <a:buNone/>
             </a:pPr>
             <a:r>
@@ -9621,7 +9829,7 @@
           <a:bodyPr wrap="square" lIns="0" tIns="0" rIns="0" bIns="0" rtlCol="0" anchor="ctr"/>
           <a:lstStyle/>
           <a:p>
-            <a:pPr indent="0" marL="0">
+            <a:pPr marL="0" indent="0">
               <a:buNone/>
             </a:pPr>
             <a:r>
@@ -9632,9 +9840,6 @@
               </a:rPr>
               <a:t>•  </a:t>
             </a:r>
-            <a:pPr indent="0" marL="0">
-              <a:buNone/>
-            </a:pPr>
             <a:r>
               <a:rPr lang="en-US" sz="1400" dirty="0">
                 <a:solidFill>
@@ -9671,7 +9876,7 @@
           <a:bodyPr wrap="square" lIns="0" tIns="0" rIns="0" bIns="0" rtlCol="0" anchor="ctr"/>
           <a:lstStyle/>
           <a:p>
-            <a:pPr indent="0" marL="0">
+            <a:pPr marL="0" indent="0">
               <a:buNone/>
             </a:pPr>
             <a:r>
@@ -9682,9 +9887,6 @@
               </a:rPr>
               <a:t>•  </a:t>
             </a:r>
-            <a:pPr indent="0" marL="0">
-              <a:buNone/>
-            </a:pPr>
             <a:r>
               <a:rPr lang="en-US" sz="1400" dirty="0">
                 <a:solidFill>
@@ -9721,7 +9923,7 @@
           <a:bodyPr wrap="square" lIns="0" tIns="0" rIns="0" bIns="0" rtlCol="0" anchor="ctr"/>
           <a:lstStyle/>
           <a:p>
-            <a:pPr indent="0" marL="0">
+            <a:pPr marL="0" indent="0">
               <a:buNone/>
             </a:pPr>
             <a:r>
@@ -9732,9 +9934,6 @@
               </a:rPr>
               <a:t>•  </a:t>
             </a:r>
-            <a:pPr indent="0" marL="0">
-              <a:buNone/>
-            </a:pPr>
             <a:r>
               <a:rPr lang="en-US" sz="1400" dirty="0">
                 <a:solidFill>
@@ -9769,6 +9968,13 @@
           </a:solidFill>
           <a:ln/>
         </p:spPr>
+        <p:txBody>
+          <a:bodyPr/>
+          <a:lstStyle/>
+          <a:p>
+            <a:endParaRPr lang="en-US"/>
+          </a:p>
+        </p:txBody>
       </p:sp>
       <p:sp>
         <p:nvSpPr>
@@ -9791,7 +9997,7 @@
           <a:bodyPr wrap="square" lIns="0" tIns="0" rIns="0" bIns="0" rtlCol="0" anchor="ctr"/>
           <a:lstStyle/>
           <a:p>
-            <a:pPr indent="0" marL="0">
+            <a:pPr marL="0" indent="0">
               <a:buNone/>
             </a:pPr>
             <a:r>
@@ -9830,7 +10036,7 @@
           <a:bodyPr wrap="square" lIns="0" tIns="0" rIns="0" bIns="0" rtlCol="0" anchor="ctr"/>
           <a:lstStyle/>
           <a:p>
-            <a:pPr indent="0" marL="0">
+            <a:pPr marL="0" indent="0">
               <a:buNone/>
             </a:pPr>
             <a:r>
@@ -9847,7 +10053,7 @@
             <a:endParaRPr lang="en-US" sz="1200" dirty="0"/>
           </a:p>
           <a:p>
-            <a:pPr indent="0" marL="0">
+            <a:pPr marL="0" indent="0">
               <a:buNone/>
             </a:pPr>
             <a:r>
@@ -9886,7 +10092,7 @@
           <a:bodyPr wrap="square" lIns="0" tIns="0" rIns="0" bIns="0" rtlCol="0" anchor="ctr"/>
           <a:lstStyle/>
           <a:p>
-            <a:pPr indent="0" marL="0">
+            <a:pPr marL="0" indent="0">
               <a:buNone/>
             </a:pPr>
             <a:r>
@@ -9925,7 +10131,7 @@
           <a:bodyPr wrap="square" lIns="0" tIns="0" rIns="0" bIns="0" rtlCol="0" anchor="ctr"/>
           <a:lstStyle/>
           <a:p>
-            <a:pPr algn="r" indent="0" marL="0">
+            <a:pPr marL="0" indent="0" algn="r">
               <a:buNone/>
             </a:pPr>
             <a:r>
@@ -10244,4 +10450,319 @@
     </a:ext>
   </a:extLst>
 </a:theme>
+</file>
+
+<file path=ppt/theme/theme2.xml><?xml version="1.0" encoding="utf-8"?>
+<a:theme xmlns:a="http://schemas.openxmlformats.org/drawingml/2006/main" name="Office Theme">
+  <a:themeElements>
+    <a:clrScheme name="Office">
+      <a:dk1>
+        <a:sysClr val="windowText" lastClr="000000"/>
+      </a:dk1>
+      <a:lt1>
+        <a:sysClr val="window" lastClr="FFFFFF"/>
+      </a:lt1>
+      <a:dk2>
+        <a:srgbClr val="0E2841"/>
+      </a:dk2>
+      <a:lt2>
+        <a:srgbClr val="E8E8E8"/>
+      </a:lt2>
+      <a:accent1>
+        <a:srgbClr val="156082"/>
+      </a:accent1>
+      <a:accent2>
+        <a:srgbClr val="E97132"/>
+      </a:accent2>
+      <a:accent3>
+        <a:srgbClr val="196B24"/>
+      </a:accent3>
+      <a:accent4>
+        <a:srgbClr val="0F9ED5"/>
+      </a:accent4>
+      <a:accent5>
+        <a:srgbClr val="A02B93"/>
+      </a:accent5>
+      <a:accent6>
+        <a:srgbClr val="4EA72E"/>
+      </a:accent6>
+      <a:hlink>
+        <a:srgbClr val="467886"/>
+      </a:hlink>
+      <a:folHlink>
+        <a:srgbClr val="96607D"/>
+      </a:folHlink>
+    </a:clrScheme>
+    <a:fontScheme name="Office">
+      <a:majorFont>
+        <a:latin typeface="Aptos Display" panose="02110004020202020204"/>
+        <a:ea typeface=""/>
+        <a:cs typeface=""/>
+        <a:font script="Jpan" typeface="游ゴシック Light"/>
+        <a:font script="Hang" typeface="맑은 고딕"/>
+        <a:font script="Hans" typeface="等线 Light"/>
+        <a:font script="Hant" typeface="新細明體"/>
+        <a:font script="Arab" typeface="Times New Roman"/>
+        <a:font script="Hebr" typeface="Times New Roman"/>
+        <a:font script="Thai" typeface="Angsana New"/>
+        <a:font script="Ethi" typeface="Nyala"/>
+        <a:font script="Beng" typeface="Vrinda"/>
+        <a:font script="Gujr" typeface="Shruti"/>
+        <a:font script="Khmr" typeface="MoolBoran"/>
+        <a:font script="Knda" typeface="Tunga"/>
+        <a:font script="Guru" typeface="Raavi"/>
+        <a:font script="Cans" typeface="Euphemia"/>
+        <a:font script="Cher" typeface="Plantagenet Cherokee"/>
+        <a:font script="Yiii" typeface="Microsoft Yi Baiti"/>
+        <a:font script="Tibt" typeface="Microsoft Himalaya"/>
+        <a:font script="Thaa" typeface="MV Boli"/>
+        <a:font script="Deva" typeface="Mangal"/>
+        <a:font script="Telu" typeface="Gautami"/>
+        <a:font script="Taml" typeface="Latha"/>
+        <a:font script="Syrc" typeface="Estrangelo Edessa"/>
+        <a:font script="Orya" typeface="Kalinga"/>
+        <a:font script="Mlym" typeface="Kartika"/>
+        <a:font script="Laoo" typeface="DokChampa"/>
+        <a:font script="Sinh" typeface="Iskoola Pota"/>
+        <a:font script="Mong" typeface="Mongolian Baiti"/>
+        <a:font script="Viet" typeface="Times New Roman"/>
+        <a:font script="Uigh" typeface="Microsoft Uighur"/>
+        <a:font script="Geor" typeface="Sylfaen"/>
+        <a:font script="Armn" typeface="Arial"/>
+        <a:font script="Bugi" typeface="Leelawadee UI"/>
+        <a:font script="Bopo" typeface="Microsoft JhengHei"/>
+        <a:font script="Java" typeface="Javanese Text"/>
+        <a:font script="Lisu" typeface="Segoe UI"/>
+        <a:font script="Mymr" typeface="Myanmar Text"/>
+        <a:font script="Nkoo" typeface="Ebrima"/>
+        <a:font script="Olck" typeface="Nirmala UI"/>
+        <a:font script="Osma" typeface="Ebrima"/>
+        <a:font script="Phag" typeface="Phagspa"/>
+        <a:font script="Syrn" typeface="Estrangelo Edessa"/>
+        <a:font script="Syrj" typeface="Estrangelo Edessa"/>
+        <a:font script="Syre" typeface="Estrangelo Edessa"/>
+        <a:font script="Sora" typeface="Nirmala UI"/>
+        <a:font script="Tale" typeface="Microsoft Tai Le"/>
+        <a:font script="Talu" typeface="Microsoft New Tai Lue"/>
+        <a:font script="Tfng" typeface="Ebrima"/>
+      </a:majorFont>
+      <a:minorFont>
+        <a:latin typeface="Aptos" panose="02110004020202020204"/>
+        <a:ea typeface=""/>
+        <a:cs typeface=""/>
+        <a:font script="Jpan" typeface="游ゴシック"/>
+        <a:font script="Hang" typeface="맑은 고딕"/>
+        <a:font script="Hans" typeface="等线"/>
+        <a:font script="Hant" typeface="新細明體"/>
+        <a:font script="Arab" typeface="Arial"/>
+        <a:font script="Hebr" typeface="Arial"/>
+        <a:font script="Thai" typeface="Cordia New"/>
+        <a:font script="Ethi" typeface="Nyala"/>
+        <a:font script="Beng" typeface="Vrinda"/>
+        <a:font script="Gujr" typeface="Shruti"/>
+        <a:font script="Khmr" typeface="DaunPenh"/>
+        <a:font script="Knda" typeface="Tunga"/>
+        <a:font script="Guru" typeface="Raavi"/>
+        <a:font script="Cans" typeface="Euphemia"/>
+        <a:font script="Cher" typeface="Plantagenet Cherokee"/>
+        <a:font script="Yiii" typeface="Microsoft Yi Baiti"/>
+        <a:font script="Tibt" typeface="Microsoft Himalaya"/>
+        <a:font script="Thaa" typeface="MV Boli"/>
+        <a:font script="Deva" typeface="Mangal"/>
+        <a:font script="Telu" typeface="Gautami"/>
+        <a:font script="Taml" typeface="Latha"/>
+        <a:font script="Syrc" typeface="Estrangelo Edessa"/>
+        <a:font script="Orya" typeface="Kalinga"/>
+        <a:font script="Mlym" typeface="Kartika"/>
+        <a:font script="Laoo" typeface="DokChampa"/>
+        <a:font script="Sinh" typeface="Iskoola Pota"/>
+        <a:font script="Mong" typeface="Mongolian Baiti"/>
+        <a:font script="Viet" typeface="Arial"/>
+        <a:font script="Uigh" typeface="Microsoft Uighur"/>
+        <a:font script="Geor" typeface="Sylfaen"/>
+        <a:font script="Armn" typeface="Arial"/>
+        <a:font script="Bugi" typeface="Leelawadee UI"/>
+        <a:font script="Bopo" typeface="Microsoft JhengHei"/>
+        <a:font script="Java" typeface="Javanese Text"/>
+        <a:font script="Lisu" typeface="Segoe UI"/>
+        <a:font script="Mymr" typeface="Myanmar Text"/>
+        <a:font script="Nkoo" typeface="Ebrima"/>
+        <a:font script="Olck" typeface="Nirmala UI"/>
+        <a:font script="Osma" typeface="Ebrima"/>
+        <a:font script="Phag" typeface="Phagspa"/>
+        <a:font script="Syrn" typeface="Estrangelo Edessa"/>
+        <a:font script="Syrj" typeface="Estrangelo Edessa"/>
+        <a:font script="Syre" typeface="Estrangelo Edessa"/>
+        <a:font script="Sora" typeface="Nirmala UI"/>
+        <a:font script="Tale" typeface="Microsoft Tai Le"/>
+        <a:font script="Talu" typeface="Microsoft New Tai Lue"/>
+        <a:font script="Tfng" typeface="Ebrima"/>
+      </a:minorFont>
+    </a:fontScheme>
+    <a:fmtScheme name="Office">
+      <a:fillStyleLst>
+        <a:solidFill>
+          <a:schemeClr val="phClr"/>
+        </a:solidFill>
+        <a:gradFill rotWithShape="1">
+          <a:gsLst>
+            <a:gs pos="0">
+              <a:schemeClr val="phClr">
+                <a:lumMod val="110000"/>
+                <a:satMod val="105000"/>
+                <a:tint val="67000"/>
+              </a:schemeClr>
+            </a:gs>
+            <a:gs pos="50000">
+              <a:schemeClr val="phClr">
+                <a:lumMod val="105000"/>
+                <a:satMod val="103000"/>
+                <a:tint val="73000"/>
+              </a:schemeClr>
+            </a:gs>
+            <a:gs pos="100000">
+              <a:schemeClr val="phClr">
+                <a:lumMod val="105000"/>
+                <a:satMod val="109000"/>
+                <a:tint val="81000"/>
+              </a:schemeClr>
+            </a:gs>
+          </a:gsLst>
+          <a:lin ang="5400000" scaled="0"/>
+        </a:gradFill>
+        <a:gradFill rotWithShape="1">
+          <a:gsLst>
+            <a:gs pos="0">
+              <a:schemeClr val="phClr">
+                <a:satMod val="103000"/>
+                <a:lumMod val="102000"/>
+                <a:tint val="94000"/>
+              </a:schemeClr>
+            </a:gs>
+            <a:gs pos="50000">
+              <a:schemeClr val="phClr">
+                <a:satMod val="110000"/>
+                <a:lumMod val="100000"/>
+                <a:shade val="100000"/>
+              </a:schemeClr>
+            </a:gs>
+            <a:gs pos="100000">
+              <a:schemeClr val="phClr">
+                <a:lumMod val="99000"/>
+                <a:satMod val="120000"/>
+                <a:shade val="78000"/>
+              </a:schemeClr>
+            </a:gs>
+          </a:gsLst>
+          <a:lin ang="5400000" scaled="0"/>
+        </a:gradFill>
+      </a:fillStyleLst>
+      <a:lnStyleLst>
+        <a:ln w="12700" cap="flat" cmpd="sng" algn="ctr">
+          <a:solidFill>
+            <a:schemeClr val="phClr"/>
+          </a:solidFill>
+          <a:prstDash val="solid"/>
+          <a:miter lim="800000"/>
+        </a:ln>
+        <a:ln w="19050" cap="flat" cmpd="sng" algn="ctr">
+          <a:solidFill>
+            <a:schemeClr val="phClr"/>
+          </a:solidFill>
+          <a:prstDash val="solid"/>
+          <a:miter lim="800000"/>
+        </a:ln>
+        <a:ln w="25400" cap="flat" cmpd="sng" algn="ctr">
+          <a:solidFill>
+            <a:schemeClr val="phClr"/>
+          </a:solidFill>
+          <a:prstDash val="solid"/>
+          <a:miter lim="800000"/>
+        </a:ln>
+      </a:lnStyleLst>
+      <a:effectStyleLst>
+        <a:effectStyle>
+          <a:effectLst/>
+        </a:effectStyle>
+        <a:effectStyle>
+          <a:effectLst/>
+        </a:effectStyle>
+        <a:effectStyle>
+          <a:effectLst>
+            <a:outerShdw blurRad="57150" dist="19050" dir="5400000" algn="ctr" rotWithShape="0">
+              <a:srgbClr val="000000">
+                <a:alpha val="63000"/>
+              </a:srgbClr>
+            </a:outerShdw>
+          </a:effectLst>
+        </a:effectStyle>
+      </a:effectStyleLst>
+      <a:bgFillStyleLst>
+        <a:solidFill>
+          <a:schemeClr val="phClr"/>
+        </a:solidFill>
+        <a:solidFill>
+          <a:schemeClr val="phClr">
+            <a:tint val="95000"/>
+            <a:satMod val="170000"/>
+          </a:schemeClr>
+        </a:solidFill>
+        <a:gradFill rotWithShape="1">
+          <a:gsLst>
+            <a:gs pos="0">
+              <a:schemeClr val="phClr">
+                <a:tint val="93000"/>
+                <a:satMod val="150000"/>
+                <a:shade val="98000"/>
+                <a:lumMod val="102000"/>
+              </a:schemeClr>
+            </a:gs>
+            <a:gs pos="50000">
+              <a:schemeClr val="phClr">
+                <a:tint val="98000"/>
+                <a:satMod val="130000"/>
+                <a:shade val="90000"/>
+                <a:lumMod val="103000"/>
+              </a:schemeClr>
+            </a:gs>
+            <a:gs pos="100000">
+              <a:schemeClr val="phClr">
+                <a:shade val="63000"/>
+                <a:satMod val="120000"/>
+              </a:schemeClr>
+            </a:gs>
+          </a:gsLst>
+          <a:lin ang="5400000" scaled="0"/>
+        </a:gradFill>
+      </a:bgFillStyleLst>
+    </a:fmtScheme>
+  </a:themeElements>
+  <a:objectDefaults>
+    <a:lnDef>
+      <a:spPr/>
+      <a:bodyPr/>
+      <a:lstStyle/>
+      <a:style>
+        <a:lnRef idx="2">
+          <a:schemeClr val="accent1"/>
+        </a:lnRef>
+        <a:fillRef idx="0">
+          <a:schemeClr val="accent1"/>
+        </a:fillRef>
+        <a:effectRef idx="1">
+          <a:schemeClr val="accent1"/>
+        </a:effectRef>
+        <a:fontRef idx="minor">
+          <a:schemeClr val="tx1"/>
+        </a:fontRef>
+      </a:style>
+    </a:lnDef>
+  </a:objectDefaults>
+  <a:extraClrSchemeLst/>
+  <a:extLst>
+    <a:ext uri="{05A4C25C-085E-4340-85A3-A5531E510DB2}">
+      <thm15:themeFamily xmlns:thm15="http://schemas.microsoft.com/office/thememl/2012/main" name="Office Theme" id="{2E142A2C-CD16-42D6-873A-C26D2A0506FA}" vid="{1BDDFF52-6CD6-40A5-AB3C-68EB2F1E4D0A}"/>
+    </a:ext>
+  </a:extLst>
+</a:theme>
 </file>